--- a/Infosys_FinOps_ConEdison.pptx
+++ b/Infosys_FinOps_ConEdison.pptx
@@ -25,6 +25,7 @@
     <p:sldId id="273" r:id="rId24"/>
     <p:sldId id="274" r:id="rId25"/>
     <p:sldId id="275" r:id="rId26"/>
+    <p:sldId id="276" r:id="rId27"/>
   </p:sldIdLst>
   <p:sldSz cx="12191695" cy="6858000" type="screen4x3"/>
   <p:notesSz cx="6858000" cy="9144000"/>
@@ -9478,7 +9479,7 @@
               </a:spcAft>
             </a:pPr>
             <a:r>
-              <a:rPr sz="1200">
+              <a:rPr sz="1150">
                 <a:solidFill>
                   <a:srgbClr val="445066"/>
                 </a:solidFill>
@@ -9494,7 +9495,7 @@
               </a:spcAft>
             </a:pPr>
             <a:r>
-              <a:rPr sz="1200">
+              <a:rPr sz="1150">
                 <a:solidFill>
                   <a:srgbClr val="445066"/>
                 </a:solidFill>
@@ -9510,12 +9511,28 @@
               </a:spcAft>
             </a:pPr>
             <a:r>
-              <a:rPr sz="1200">
+              <a:rPr sz="1150">
                 <a:solidFill>
                   <a:srgbClr val="445066"/>
                 </a:solidFill>
                 <a:latin typeface="Segoe UI"/>
               </a:rPr>
+              <a:t>—  A point must be BOTH statistically odd AND financially material (≥25% deviation). The statistical test alone flags a 5% wobble in a low-variance series, and an alert nobody can act on teaches people to ignore the channel</a:t>
+            </a:r>
+          </a:p>
+          <a:p>
+            <a:pPr>
+              <a:spcAft>
+                <a:spcPts val="900"/>
+              </a:spcAft>
+            </a:pPr>
+            <a:r>
+              <a:rPr sz="1150">
+                <a:solidFill>
+                  <a:srgbClr val="445066"/>
+                </a:solidFill>
+                <a:latin typeface="Segoe UI"/>
+              </a:rPr>
               <a:t>—  Mirrors AWS Cost Anomaly Detection semantics: ≥10-day warm-up, dynamic thresholds rather than a static dollar line</a:t>
             </a:r>
           </a:p>
@@ -9526,7 +9543,7 @@
               </a:spcAft>
             </a:pPr>
             <a:r>
-              <a:rPr sz="1200">
+              <a:rPr sz="1150">
                 <a:solidFill>
                   <a:srgbClr val="445066"/>
                 </a:solidFill>
@@ -10521,7 +10538,7 @@
                 </a:solidFill>
                 <a:latin typeface="Segoe UI"/>
               </a:rPr>
-              <a:t>OpenAI + LangGraph — every figure quoted comes from a tool call against the FOCUS frame</a:t>
+              <a:t>Google ADK on Gemini — every figure quoted comes from a tool call against the FOCUS frame</a:t>
             </a:r>
           </a:p>
         </p:txBody>
@@ -10683,13 +10700,13 @@
               </a:spcAft>
             </a:pPr>
             <a:r>
-              <a:rPr sz="950" b="0">
+              <a:rPr sz="850" b="0">
                 <a:solidFill>
                   <a:srgbClr val="7A8599"/>
                 </a:solidFill>
                 <a:latin typeface="Segoe UI"/>
               </a:rPr>
-              <a:t>routes on gpt-5-mini</a:t>
+              <a:t>routes on gemini-3.1-flash-lite</a:t>
             </a:r>
           </a:p>
         </p:txBody>
@@ -11374,13 +11391,13 @@
               </a:spcAft>
             </a:pPr>
             <a:r>
-              <a:rPr sz="1150">
+              <a:rPr sz="1100">
                 <a:solidFill>
                   <a:srgbClr val="445066"/>
                 </a:solidFill>
                 <a:latin typeface="Segoe UI"/>
               </a:rPr>
-              <a:t>—  Twelve tools query the loaded FOCUS frame directly — the model never recites a number from memory</a:t>
+              <a:t>—  Typed tools query the loaded FOCUS frame directly — the model never recites a number from memory, and it cannot write SQL</a:t>
             </a:r>
           </a:p>
           <a:p>
@@ -11390,13 +11407,13 @@
               </a:spcAft>
             </a:pPr>
             <a:r>
-              <a:rPr sz="1150">
+              <a:rPr sz="1100">
                 <a:solidFill>
                   <a:srgbClr val="445066"/>
                 </a:solidFill>
                 <a:latin typeface="Segoe UI"/>
               </a:rPr>
-              <a:t>—  The supervisor routes on the cheap model and specialists reason on the strong one: the small-model-first lever, applied to ourselves</a:t>
+              <a:t>—  The coordinator routes on the cheap model and specialists reason on the strong one: the small-model-first lever, applied to ourselves</a:t>
             </a:r>
           </a:p>
           <a:p>
@@ -11406,13 +11423,13 @@
               </a:spcAft>
             </a:pPr>
             <a:r>
-              <a:rPr sz="1150">
+              <a:rPr sz="1100">
                 <a:solidFill>
                   <a:srgbClr val="445066"/>
                 </a:solidFill>
                 <a:latin typeface="Segoe UI"/>
               </a:rPr>
-              <a:t>—  A whitelist of columns and operators guards the free-form query tool. No eval, ever</a:t>
+              <a:t>—  Specialists are held as tools, not sub-agents, so one voice writes the final answer for one persona</a:t>
             </a:r>
           </a:p>
           <a:p>
@@ -11422,13 +11439,13 @@
               </a:spcAft>
             </a:pPr>
             <a:r>
-              <a:rPr sz="1150">
+              <a:rPr sz="1100">
                 <a:solidFill>
                   <a:srgbClr val="445066"/>
                 </a:solidFill>
                 <a:latin typeface="Segoe UI"/>
               </a:rPr>
-              <a:t>—  Loop-guarded at eight iterations; the whole tab degrades to an explanatory panel with no API key</a:t>
+              <a:t>—  A column whitelist guards every query. No eval, ever. Loop-guarded, and it degrades to an explanation when the model is unreachable</a:t>
             </a:r>
           </a:p>
         </p:txBody>
@@ -11811,7 +11828,7 @@
                 </a:solidFill>
                 <a:latin typeface="Segoe UI"/>
               </a:rPr>
-              <a:t>The supervisor reads the question and the asking persona, and picks a specialist via structured output — not free text. Cheap model, one call.</a:t>
+              <a:t>The coordinator reads the question and the asking persona, and calls the specialists it needs. Cheap model, one call.</a:t>
             </a:r>
           </a:p>
         </p:txBody>
@@ -12351,7 +12368,7 @@
                 </a:solidFill>
                 <a:latin typeface="Segoe UI"/>
               </a:rPr>
-              <a:t>The supervisor stops and the answer streams token by token, citing the figure and the tool it came from, in outcome terms for a VP.</a:t>
+              <a:t>The coordinator writes one answer, streamed token by token, citing the figure and the tool it came from, in outcome terms for a VP.</a:t>
             </a:r>
           </a:p>
         </p:txBody>
@@ -12390,7 +12407,7 @@
                 </a:solidFill>
                 <a:latin typeface="Segoe UI"/>
               </a:rPr>
-              <a:t>Guard rails: a hard stop at eight supervisor iterations, a recursion limit of 60, and a checkpointer keyed by a stable thread id so the conversation survives a page rerun.</a:t>
+              <a:t>Guard rails: a bounded agent loop, a session keyed by a stable id so the conversation survives a page reload, and a tool layer that returns a status rather than raising -- a tool that throws kills the agent.</a:t>
             </a:r>
           </a:p>
         </p:txBody>
@@ -12516,7 +12533,7 @@
                 </a:solidFill>
                 <a:latin typeface="Segoe UI"/>
               </a:rPr>
-              <a:t>VENDOR NEUTRALITY</a:t>
+              <a:t>TARGET ARCHITECTURE</a:t>
             </a:r>
           </a:p>
         </p:txBody>
@@ -12555,7 +12572,7 @@
                 </a:solidFill>
                 <a:latin typeface="Segoe UI"/>
               </a:rPr>
-              <a:t>17 connectors, one schema</a:t>
+              <a:t>Running this on Google Cloud</a:t>
             </a:r>
           </a:p>
         </p:txBody>
@@ -12594,7 +12611,7 @@
                 </a:solidFill>
                 <a:latin typeface="Segoe UI"/>
               </a:rPr>
-              <a:t>Whatever Con Edison procures, the dashboards do not change</a:t>
+              <a:t>The engines are unchanged. What changes is the warehouse, the runtime and the model.</a:t>
             </a:r>
           </a:p>
         </p:txBody>
@@ -12652,7 +12669,7 @@
         <p:spPr>
           <a:xfrm>
             <a:off x="640080" y="2011680"/>
-            <a:ext cx="10881360" cy="1234440"/>
+            <a:ext cx="5760720" cy="896112"/>
           </a:xfrm>
           <a:prstGeom prst="roundRect">
             <a:avLst>
@@ -12691,168 +12708,92 @@
       </p:sp>
       <p:sp>
         <p:nvSpPr>
-          <p:cNvPr id="7" name="Rectangle 6"/>
+          <p:cNvPr id="7" name="TextBox 6"/>
+          <p:cNvSpPr txBox="1"/>
+          <p:nvPr/>
+        </p:nvSpPr>
+        <p:spPr>
+          <a:xfrm>
+            <a:off x="868680" y="2103120"/>
+            <a:ext cx="2103120" cy="320040"/>
+          </a:xfrm>
+          <a:prstGeom prst="rect">
+            <a:avLst/>
+          </a:prstGeom>
+          <a:noFill/>
+        </p:spPr>
+        <p:txBody>
+          <a:bodyPr wrap="square">
+            <a:spAutoFit/>
+          </a:bodyPr>
+          <a:lstStyle/>
+          <a:p>
+            <a:pPr algn="l">
+              <a:spcAft>
+                <a:spcPts val="400"/>
+              </a:spcAft>
+            </a:pPr>
+            <a:r>
+              <a:rPr sz="1250" b="1">
+                <a:solidFill>
+                  <a:srgbClr val="1E6FD9"/>
+                </a:solidFill>
+                <a:latin typeface="Segoe UI"/>
+              </a:rPr>
+              <a:t>Cloud Run</a:t>
+            </a:r>
+          </a:p>
+        </p:txBody>
+      </p:sp>
+      <p:sp>
+        <p:nvSpPr>
+          <p:cNvPr id="8" name="TextBox 7"/>
+          <p:cNvSpPr txBox="1"/>
+          <p:nvPr/>
+        </p:nvSpPr>
+        <p:spPr>
+          <a:xfrm>
+            <a:off x="868680" y="2395728"/>
+            <a:ext cx="5303520" cy="457200"/>
+          </a:xfrm>
+          <a:prstGeom prst="rect">
+            <a:avLst/>
+          </a:prstGeom>
+          <a:noFill/>
+        </p:spPr>
+        <p:txBody>
+          <a:bodyPr wrap="square">
+            <a:spAutoFit/>
+          </a:bodyPr>
+          <a:lstStyle/>
+          <a:p>
+            <a:pPr algn="l">
+              <a:spcAft>
+                <a:spcPts val="400"/>
+              </a:spcAft>
+            </a:pPr>
+            <a:r>
+              <a:rPr sz="1000" b="0">
+                <a:solidFill>
+                  <a:srgbClr val="445066"/>
+                </a:solidFill>
+                <a:latin typeface="Segoe UI"/>
+              </a:rPr>
+              <a:t>FastAPI service, scales to zero. React client behind a load balancer and IAP.</a:t>
+            </a:r>
+          </a:p>
+        </p:txBody>
+      </p:sp>
+      <p:sp>
+        <p:nvSpPr>
+          <p:cNvPr id="9" name="Rounded Rectangle 8"/>
           <p:cNvSpPr/>
           <p:nvPr/>
         </p:nvSpPr>
         <p:spPr>
           <a:xfrm>
-            <a:off x="640080" y="2011680"/>
-            <a:ext cx="50800" cy="1234440"/>
-          </a:xfrm>
-          <a:prstGeom prst="rect">
-            <a:avLst/>
-          </a:prstGeom>
-          <a:solidFill>
-            <a:srgbClr val="1E6FD9"/>
-          </a:solidFill>
-          <a:ln>
-            <a:noFill/>
-          </a:ln>
-          <a:effectLst/>
-        </p:spPr>
-        <p:style>
-          <a:lnRef idx="1">
-            <a:schemeClr val="accent1"/>
-          </a:lnRef>
-          <a:fillRef idx="3">
-            <a:schemeClr val="accent1"/>
-          </a:fillRef>
-          <a:effectRef idx="2">
-            <a:schemeClr val="accent1"/>
-          </a:effectRef>
-          <a:fontRef idx="minor">
-            <a:schemeClr val="lt1"/>
-          </a:fontRef>
-        </p:style>
-        <p:txBody>
-          <a:bodyPr rtlCol="0" anchor="ctr"/>
-          <a:lstStyle/>
-          <a:p>
-            <a:pPr algn="ctr"/>
-          </a:p>
-        </p:txBody>
-      </p:sp>
-      <p:sp>
-        <p:nvSpPr>
-          <p:cNvPr id="8" name="TextBox 7"/>
-          <p:cNvSpPr txBox="1"/>
-          <p:nvPr/>
-        </p:nvSpPr>
-        <p:spPr>
-          <a:xfrm>
-            <a:off x="914400" y="2121408"/>
-            <a:ext cx="2468880" cy="365760"/>
-          </a:xfrm>
-          <a:prstGeom prst="rect">
-            <a:avLst/>
-          </a:prstGeom>
-          <a:noFill/>
-        </p:spPr>
-        <p:txBody>
-          <a:bodyPr wrap="square">
-            <a:spAutoFit/>
-          </a:bodyPr>
-          <a:lstStyle/>
-          <a:p>
-            <a:pPr algn="l">
-              <a:spcAft>
-                <a:spcPts val="400"/>
-              </a:spcAft>
-            </a:pPr>
-            <a:r>
-              <a:rPr sz="1350" b="1">
-                <a:solidFill>
-                  <a:srgbClr val="0B142A"/>
-                </a:solidFill>
-                <a:latin typeface="Segoe UI"/>
-              </a:rPr>
-              <a:t>Native cloud</a:t>
-            </a:r>
-          </a:p>
-        </p:txBody>
-      </p:sp>
-      <p:sp>
-        <p:nvSpPr>
-          <p:cNvPr id="9" name="TextBox 8"/>
-          <p:cNvSpPr txBox="1"/>
-          <p:nvPr/>
-        </p:nvSpPr>
-        <p:spPr>
-          <a:xfrm>
-            <a:off x="3474720" y="2103120"/>
-            <a:ext cx="7772400" cy="1051560"/>
-          </a:xfrm>
-          <a:prstGeom prst="rect">
-            <a:avLst/>
-          </a:prstGeom>
-          <a:noFill/>
-        </p:spPr>
-        <p:txBody>
-          <a:bodyPr wrap="square">
-            <a:spAutoFit/>
-          </a:bodyPr>
-          <a:lstStyle/>
-          <a:p>
-            <a:pPr>
-              <a:spcAft>
-                <a:spcPts val="900"/>
-              </a:spcAft>
-            </a:pPr>
-            <a:r>
-              <a:rPr sz="1050">
-                <a:solidFill>
-                  <a:srgbClr val="445066"/>
-                </a:solidFill>
-                <a:latin typeface="Segoe UI"/>
-              </a:rPr>
-              <a:t>·  AWS — Data Exports (FOCUS 1.2), Cost Explorer, Cost Optimization Hub</a:t>
-            </a:r>
-          </a:p>
-          <a:p>
-            <a:pPr>
-              <a:spcAft>
-                <a:spcPts val="900"/>
-              </a:spcAft>
-            </a:pPr>
-            <a:r>
-              <a:rPr sz="1050">
-                <a:solidFill>
-                  <a:srgbClr val="445066"/>
-                </a:solidFill>
-                <a:latin typeface="Segoe UI"/>
-              </a:rPr>
-              <a:t>·  Azure — Cost Management, FocusCost exports, Advisor</a:t>
-            </a:r>
-          </a:p>
-          <a:p>
-            <a:pPr>
-              <a:spcAft>
-                <a:spcPts val="900"/>
-              </a:spcAft>
-            </a:pPr>
-            <a:r>
-              <a:rPr sz="1050">
-                <a:solidFill>
-                  <a:srgbClr val="445066"/>
-                </a:solidFill>
-                <a:latin typeface="Segoe UI"/>
-              </a:rPr>
-              <a:t>·  GCP — BigQuery billing export, Recommender, Budgets</a:t>
-            </a:r>
-          </a:p>
-        </p:txBody>
-      </p:sp>
-      <p:sp>
-        <p:nvSpPr>
-          <p:cNvPr id="10" name="Rounded Rectangle 9"/>
-          <p:cNvSpPr/>
-          <p:nvPr/>
-        </p:nvSpPr>
-        <p:spPr>
-          <a:xfrm>
-            <a:off x="640080" y="3383280"/>
-            <a:ext cx="10881360" cy="1234440"/>
+            <a:off x="640080" y="2999232"/>
+            <a:ext cx="5760720" cy="896112"/>
           </a:xfrm>
           <a:prstGeom prst="roundRect">
             <a:avLst>
@@ -12891,168 +12832,92 @@
       </p:sp>
       <p:sp>
         <p:nvSpPr>
-          <p:cNvPr id="11" name="Rectangle 10"/>
+          <p:cNvPr id="10" name="TextBox 9"/>
+          <p:cNvSpPr txBox="1"/>
+          <p:nvPr/>
+        </p:nvSpPr>
+        <p:spPr>
+          <a:xfrm>
+            <a:off x="868680" y="3090672"/>
+            <a:ext cx="2103120" cy="320040"/>
+          </a:xfrm>
+          <a:prstGeom prst="rect">
+            <a:avLst/>
+          </a:prstGeom>
+          <a:noFill/>
+        </p:spPr>
+        <p:txBody>
+          <a:bodyPr wrap="square">
+            <a:spAutoFit/>
+          </a:bodyPr>
+          <a:lstStyle/>
+          <a:p>
+            <a:pPr algn="l">
+              <a:spcAft>
+                <a:spcPts val="400"/>
+              </a:spcAft>
+            </a:pPr>
+            <a:r>
+              <a:rPr sz="1250" b="1">
+                <a:solidFill>
+                  <a:srgbClr val="1E6FD9"/>
+                </a:solidFill>
+                <a:latin typeface="Segoe UI"/>
+              </a:rPr>
+              <a:t>BigQuery</a:t>
+            </a:r>
+          </a:p>
+        </p:txBody>
+      </p:sp>
+      <p:sp>
+        <p:nvSpPr>
+          <p:cNvPr id="11" name="TextBox 10"/>
+          <p:cNvSpPr txBox="1"/>
+          <p:nvPr/>
+        </p:nvSpPr>
+        <p:spPr>
+          <a:xfrm>
+            <a:off x="868680" y="3383280"/>
+            <a:ext cx="5303520" cy="457200"/>
+          </a:xfrm>
+          <a:prstGeom prst="rect">
+            <a:avLst/>
+          </a:prstGeom>
+          <a:noFill/>
+        </p:spPr>
+        <p:txBody>
+          <a:bodyPr wrap="square">
+            <a:spAutoFit/>
+          </a:bodyPr>
+          <a:lstStyle/>
+          <a:p>
+            <a:pPr algn="l">
+              <a:spcAft>
+                <a:spcPts val="400"/>
+              </a:spcAft>
+            </a:pPr>
+            <a:r>
+              <a:rPr sz="1000" b="0">
+                <a:solidFill>
+                  <a:srgbClr val="445066"/>
+                </a:solidFill>
+                <a:latin typeface="Segoe UI"/>
+              </a:rPr>
+              <a:t>The FOCUS 1.2 warehouse. Partitioned on ChargePeriodStart, clustered on cloud, service category and application.</a:t>
+            </a:r>
+          </a:p>
+        </p:txBody>
+      </p:sp>
+      <p:sp>
+        <p:nvSpPr>
+          <p:cNvPr id="12" name="Rounded Rectangle 11"/>
           <p:cNvSpPr/>
           <p:nvPr/>
         </p:nvSpPr>
         <p:spPr>
           <a:xfrm>
-            <a:off x="640080" y="3383280"/>
-            <a:ext cx="50800" cy="1234440"/>
-          </a:xfrm>
-          <a:prstGeom prst="rect">
-            <a:avLst/>
-          </a:prstGeom>
-          <a:solidFill>
-            <a:srgbClr val="5B4BC4"/>
-          </a:solidFill>
-          <a:ln>
-            <a:noFill/>
-          </a:ln>
-          <a:effectLst/>
-        </p:spPr>
-        <p:style>
-          <a:lnRef idx="1">
-            <a:schemeClr val="accent1"/>
-          </a:lnRef>
-          <a:fillRef idx="3">
-            <a:schemeClr val="accent1"/>
-          </a:fillRef>
-          <a:effectRef idx="2">
-            <a:schemeClr val="accent1"/>
-          </a:effectRef>
-          <a:fontRef idx="minor">
-            <a:schemeClr val="lt1"/>
-          </a:fontRef>
-        </p:style>
-        <p:txBody>
-          <a:bodyPr rtlCol="0" anchor="ctr"/>
-          <a:lstStyle/>
-          <a:p>
-            <a:pPr algn="ctr"/>
-          </a:p>
-        </p:txBody>
-      </p:sp>
-      <p:sp>
-        <p:nvSpPr>
-          <p:cNvPr id="12" name="TextBox 11"/>
-          <p:cNvSpPr txBox="1"/>
-          <p:nvPr/>
-        </p:nvSpPr>
-        <p:spPr>
-          <a:xfrm>
-            <a:off x="914400" y="3493008"/>
-            <a:ext cx="2468880" cy="365760"/>
-          </a:xfrm>
-          <a:prstGeom prst="rect">
-            <a:avLst/>
-          </a:prstGeom>
-          <a:noFill/>
-        </p:spPr>
-        <p:txBody>
-          <a:bodyPr wrap="square">
-            <a:spAutoFit/>
-          </a:bodyPr>
-          <a:lstStyle/>
-          <a:p>
-            <a:pPr algn="l">
-              <a:spcAft>
-                <a:spcPts val="400"/>
-              </a:spcAft>
-            </a:pPr>
-            <a:r>
-              <a:rPr sz="1350" b="1">
-                <a:solidFill>
-                  <a:srgbClr val="0B142A"/>
-                </a:solidFill>
-                <a:latin typeface="Segoe UI"/>
-              </a:rPr>
-              <a:t>Procured platforms</a:t>
-            </a:r>
-          </a:p>
-        </p:txBody>
-      </p:sp>
-      <p:sp>
-        <p:nvSpPr>
-          <p:cNvPr id="13" name="TextBox 12"/>
-          <p:cNvSpPr txBox="1"/>
-          <p:nvPr/>
-        </p:nvSpPr>
-        <p:spPr>
-          <a:xfrm>
-            <a:off x="3474720" y="3474720"/>
-            <a:ext cx="7772400" cy="1051560"/>
-          </a:xfrm>
-          <a:prstGeom prst="rect">
-            <a:avLst/>
-          </a:prstGeom>
-          <a:noFill/>
-        </p:spPr>
-        <p:txBody>
-          <a:bodyPr wrap="square">
-            <a:spAutoFit/>
-          </a:bodyPr>
-          <a:lstStyle/>
-          <a:p>
-            <a:pPr>
-              <a:spcAft>
-                <a:spcPts val="900"/>
-              </a:spcAft>
-            </a:pPr>
-            <a:r>
-              <a:rPr sz="1050">
-                <a:solidFill>
-                  <a:srgbClr val="445066"/>
-                </a:solidFill>
-                <a:latin typeface="Segoe UI"/>
-              </a:rPr>
-              <a:t>·  Apptio Cloudability · Tanzu CloudHealth · Flexera One</a:t>
-            </a:r>
-          </a:p>
-          <a:p>
-            <a:pPr>
-              <a:spcAft>
-                <a:spcPts val="900"/>
-              </a:spcAft>
-            </a:pPr>
-            <a:r>
-              <a:rPr sz="1050">
-                <a:solidFill>
-                  <a:srgbClr val="445066"/>
-                </a:solidFill>
-                <a:latin typeface="Segoe UI"/>
-              </a:rPr>
-              <a:t>·  Finout · Vantage · CloudZero · Harness CCM · nOps</a:t>
-            </a:r>
-          </a:p>
-          <a:p>
-            <a:pPr>
-              <a:spcAft>
-                <a:spcPts val="900"/>
-              </a:spcAft>
-            </a:pPr>
-            <a:r>
-              <a:rPr sz="1050">
-                <a:solidFill>
-                  <a:srgbClr val="445066"/>
-                </a:solidFill>
-                <a:latin typeface="Segoe UI"/>
-              </a:rPr>
-              <a:t>·  Kubecost · OpenCost · IBM Turbonomic · ServiceNow</a:t>
-            </a:r>
-          </a:p>
-        </p:txBody>
-      </p:sp>
-      <p:sp>
-        <p:nvSpPr>
-          <p:cNvPr id="14" name="Rounded Rectangle 13"/>
-          <p:cNvSpPr/>
-          <p:nvPr/>
-        </p:nvSpPr>
-        <p:spPr>
-          <a:xfrm>
-            <a:off x="640080" y="4754880"/>
-            <a:ext cx="10881360" cy="1234440"/>
+            <a:off x="640080" y="3986784"/>
+            <a:ext cx="5760720" cy="896112"/>
           </a:xfrm>
           <a:prstGeom prst="roundRect">
             <a:avLst>
@@ -13091,14 +12956,450 @@
       </p:sp>
       <p:sp>
         <p:nvSpPr>
-          <p:cNvPr id="15" name="Rectangle 14"/>
+          <p:cNvPr id="13" name="TextBox 12"/>
+          <p:cNvSpPr txBox="1"/>
+          <p:nvPr/>
+        </p:nvSpPr>
+        <p:spPr>
+          <a:xfrm>
+            <a:off x="868680" y="4078224"/>
+            <a:ext cx="2103120" cy="320040"/>
+          </a:xfrm>
+          <a:prstGeom prst="rect">
+            <a:avLst/>
+          </a:prstGeom>
+          <a:noFill/>
+        </p:spPr>
+        <p:txBody>
+          <a:bodyPr wrap="square">
+            <a:spAutoFit/>
+          </a:bodyPr>
+          <a:lstStyle/>
+          <a:p>
+            <a:pPr algn="l">
+              <a:spcAft>
+                <a:spcPts val="400"/>
+              </a:spcAft>
+            </a:pPr>
+            <a:r>
+              <a:rPr sz="1250" b="1">
+                <a:solidFill>
+                  <a:srgbClr val="1E6FD9"/>
+                </a:solidFill>
+                <a:latin typeface="Segoe UI"/>
+              </a:rPr>
+              <a:t>Cloud Run Job</a:t>
+            </a:r>
+          </a:p>
+        </p:txBody>
+      </p:sp>
+      <p:sp>
+        <p:nvSpPr>
+          <p:cNvPr id="14" name="TextBox 13"/>
+          <p:cNvSpPr txBox="1"/>
+          <p:nvPr/>
+        </p:nvSpPr>
+        <p:spPr>
+          <a:xfrm>
+            <a:off x="868680" y="4370832"/>
+            <a:ext cx="5303520" cy="457200"/>
+          </a:xfrm>
+          <a:prstGeom prst="rect">
+            <a:avLst/>
+          </a:prstGeom>
+          <a:noFill/>
+        </p:spPr>
+        <p:txBody>
+          <a:bodyPr wrap="square">
+            <a:spAutoFit/>
+          </a:bodyPr>
+          <a:lstStyle/>
+          <a:p>
+            <a:pPr algn="l">
+              <a:spcAft>
+                <a:spcPts val="400"/>
+              </a:spcAft>
+            </a:pPr>
+            <a:r>
+              <a:rPr sz="1000" b="0">
+                <a:solidFill>
+                  <a:srgbClr val="445066"/>
+                </a:solidFill>
+                <a:latin typeface="Segoe UI"/>
+              </a:rPr>
+              <a:t>Nightly ingest through the same connectors, plus a materialised optimization snapshot.</a:t>
+            </a:r>
+          </a:p>
+        </p:txBody>
+      </p:sp>
+      <p:sp>
+        <p:nvSpPr>
+          <p:cNvPr id="15" name="Rounded Rectangle 14"/>
           <p:cNvSpPr/>
           <p:nvPr/>
         </p:nvSpPr>
         <p:spPr>
           <a:xfrm>
-            <a:off x="640080" y="4754880"/>
-            <a:ext cx="50800" cy="1234440"/>
+            <a:off x="640080" y="4974336"/>
+            <a:ext cx="5760720" cy="896112"/>
+          </a:xfrm>
+          <a:prstGeom prst="roundRect">
+            <a:avLst>
+              <a:gd name="adj" fmla="val 6000"/>
+            </a:avLst>
+          </a:prstGeom>
+          <a:solidFill>
+            <a:srgbClr val="FFFFFF"/>
+          </a:solidFill>
+          <a:ln w="12700">
+            <a:solidFill>
+              <a:srgbClr val="E2E7EF"/>
+            </a:solidFill>
+          </a:ln>
+          <a:effectLst/>
+        </p:spPr>
+        <p:style>
+          <a:lnRef idx="1">
+            <a:schemeClr val="accent1"/>
+          </a:lnRef>
+          <a:fillRef idx="3">
+            <a:schemeClr val="accent1"/>
+          </a:fillRef>
+          <a:effectRef idx="2">
+            <a:schemeClr val="accent1"/>
+          </a:effectRef>
+          <a:fontRef idx="minor">
+            <a:schemeClr val="lt1"/>
+          </a:fontRef>
+        </p:style>
+        <p:txBody>
+          <a:bodyPr rtlCol="0" anchor="ctr"/>
+          <a:lstStyle/>
+          <a:p/>
+        </p:txBody>
+      </p:sp>
+      <p:sp>
+        <p:nvSpPr>
+          <p:cNvPr id="16" name="TextBox 15"/>
+          <p:cNvSpPr txBox="1"/>
+          <p:nvPr/>
+        </p:nvSpPr>
+        <p:spPr>
+          <a:xfrm>
+            <a:off x="868680" y="5065776"/>
+            <a:ext cx="2103120" cy="320040"/>
+          </a:xfrm>
+          <a:prstGeom prst="rect">
+            <a:avLst/>
+          </a:prstGeom>
+          <a:noFill/>
+        </p:spPr>
+        <p:txBody>
+          <a:bodyPr wrap="square">
+            <a:spAutoFit/>
+          </a:bodyPr>
+          <a:lstStyle/>
+          <a:p>
+            <a:pPr algn="l">
+              <a:spcAft>
+                <a:spcPts val="400"/>
+              </a:spcAft>
+            </a:pPr>
+            <a:r>
+              <a:rPr sz="1250" b="1">
+                <a:solidFill>
+                  <a:srgbClr val="1E6FD9"/>
+                </a:solidFill>
+                <a:latin typeface="Segoe UI"/>
+              </a:rPr>
+              <a:t>Gemini via Vertex</a:t>
+            </a:r>
+          </a:p>
+        </p:txBody>
+      </p:sp>
+      <p:sp>
+        <p:nvSpPr>
+          <p:cNvPr id="17" name="TextBox 16"/>
+          <p:cNvSpPr txBox="1"/>
+          <p:nvPr/>
+        </p:nvSpPr>
+        <p:spPr>
+          <a:xfrm>
+            <a:off x="868680" y="5358384"/>
+            <a:ext cx="5303520" cy="457200"/>
+          </a:xfrm>
+          <a:prstGeom prst="rect">
+            <a:avLst/>
+          </a:prstGeom>
+          <a:noFill/>
+        </p:spPr>
+        <p:txBody>
+          <a:bodyPr wrap="square">
+            <a:spAutoFit/>
+          </a:bodyPr>
+          <a:lstStyle/>
+          <a:p>
+            <a:pPr algn="l">
+              <a:spcAft>
+                <a:spcPts val="400"/>
+              </a:spcAft>
+            </a:pPr>
+            <a:r>
+              <a:rPr sz="1000" b="0">
+                <a:solidFill>
+                  <a:srgbClr val="445066"/>
+                </a:solidFill>
+                <a:latin typeface="Segoe UI"/>
+              </a:rPr>
+              <a:t>Agents authenticate with the service account. No API key exists anywhere.</a:t>
+            </a:r>
+          </a:p>
+        </p:txBody>
+      </p:sp>
+      <p:sp>
+        <p:nvSpPr>
+          <p:cNvPr id="18" name="TextBox 17"/>
+          <p:cNvSpPr txBox="1"/>
+          <p:nvPr/>
+        </p:nvSpPr>
+        <p:spPr>
+          <a:xfrm>
+            <a:off x="6675120" y="2011680"/>
+            <a:ext cx="4846320" cy="320040"/>
+          </a:xfrm>
+          <a:prstGeom prst="rect">
+            <a:avLst/>
+          </a:prstGeom>
+          <a:noFill/>
+        </p:spPr>
+        <p:txBody>
+          <a:bodyPr wrap="square">
+            <a:spAutoFit/>
+          </a:bodyPr>
+          <a:lstStyle/>
+          <a:p>
+            <a:pPr algn="l">
+              <a:spcAft>
+                <a:spcPts val="400"/>
+              </a:spcAft>
+            </a:pPr>
+            <a:r>
+              <a:rPr sz="1300" b="1">
+                <a:solidFill>
+                  <a:srgbClr val="0B142A"/>
+                </a:solidFill>
+                <a:latin typeface="Segoe UI"/>
+              </a:rPr>
+              <a:t>Why pandas forced the rebuild</a:t>
+            </a:r>
+          </a:p>
+        </p:txBody>
+      </p:sp>
+      <p:sp>
+        <p:nvSpPr>
+          <p:cNvPr id="19" name="TextBox 18"/>
+          <p:cNvSpPr txBox="1"/>
+          <p:nvPr/>
+        </p:nvSpPr>
+        <p:spPr>
+          <a:xfrm>
+            <a:off x="6675120" y="2377440"/>
+            <a:ext cx="4846320" cy="1188720"/>
+          </a:xfrm>
+          <a:prstGeom prst="rect">
+            <a:avLst/>
+          </a:prstGeom>
+          <a:noFill/>
+        </p:spPr>
+        <p:txBody>
+          <a:bodyPr wrap="square">
+            <a:spAutoFit/>
+          </a:bodyPr>
+          <a:lstStyle/>
+          <a:p>
+            <a:pPr algn="l">
+              <a:spcAft>
+                <a:spcPts val="400"/>
+              </a:spcAft>
+            </a:pPr>
+            <a:r>
+              <a:rPr sz="1050" b="0">
+                <a:solidFill>
+                  <a:srgbClr val="445066"/>
+                </a:solidFill>
+                <a:latin typeface="Segoe UI"/>
+              </a:rPr>
+              <a:t>A utility estate at ~500k billing line-items a month is roughly 8 GB of memory over two years; a large enterprise at 2M/month is ~31 GB. The demo loads the whole frame into one process. It demonstrates well and it will not survive Con Edison. BigQuery is not optional.</a:t>
+            </a:r>
+          </a:p>
+        </p:txBody>
+      </p:sp>
+      <p:sp>
+        <p:nvSpPr>
+          <p:cNvPr id="20" name="TextBox 19"/>
+          <p:cNvSpPr txBox="1"/>
+          <p:nvPr/>
+        </p:nvSpPr>
+        <p:spPr>
+          <a:xfrm>
+            <a:off x="6675120" y="3703320"/>
+            <a:ext cx="4846320" cy="320040"/>
+          </a:xfrm>
+          <a:prstGeom prst="rect">
+            <a:avLst/>
+          </a:prstGeom>
+          <a:noFill/>
+        </p:spPr>
+        <p:txBody>
+          <a:bodyPr wrap="square">
+            <a:spAutoFit/>
+          </a:bodyPr>
+          <a:lstStyle/>
+          <a:p>
+            <a:pPr algn="l">
+              <a:spcAft>
+                <a:spcPts val="400"/>
+              </a:spcAft>
+            </a:pPr>
+            <a:r>
+              <a:rPr sz="1300" b="1">
+                <a:solidFill>
+                  <a:srgbClr val="0B142A"/>
+                </a:solidFill>
+                <a:latin typeface="Segoe UI"/>
+              </a:rPr>
+              <a:t>Three cost guards</a:t>
+            </a:r>
+          </a:p>
+        </p:txBody>
+      </p:sp>
+      <p:sp>
+        <p:nvSpPr>
+          <p:cNvPr id="21" name="TextBox 20"/>
+          <p:cNvSpPr txBox="1"/>
+          <p:nvPr/>
+        </p:nvSpPr>
+        <p:spPr>
+          <a:xfrm>
+            <a:off x="6675120" y="4069080"/>
+            <a:ext cx="4846320" cy="1463040"/>
+          </a:xfrm>
+          <a:prstGeom prst="rect">
+            <a:avLst/>
+          </a:prstGeom>
+          <a:noFill/>
+        </p:spPr>
+        <p:txBody>
+          <a:bodyPr wrap="square">
+            <a:spAutoFit/>
+          </a:bodyPr>
+          <a:lstStyle/>
+          <a:p>
+            <a:pPr>
+              <a:spcAft>
+                <a:spcPts val="900"/>
+              </a:spcAft>
+            </a:pPr>
+            <a:r>
+              <a:rPr sz="1050">
+                <a:solidFill>
+                  <a:srgbClr val="445066"/>
+                </a:solidFill>
+                <a:latin typeface="Segoe UI"/>
+              </a:rPr>
+              <a:t>—  A query with no period filter is rejected, not answered</a:t>
+            </a:r>
+          </a:p>
+          <a:p>
+            <a:pPr>
+              <a:spcAft>
+                <a:spcPts val="900"/>
+              </a:spcAft>
+            </a:pPr>
+            <a:r>
+              <a:rPr sz="1050">
+                <a:solidFill>
+                  <a:srgbClr val="445066"/>
+                </a:solidFill>
+                <a:latin typeface="Segoe UI"/>
+              </a:rPr>
+              <a:t>—  Every job caps bytes billed — BigQuery fails rather than bills</a:t>
+            </a:r>
+          </a:p>
+          <a:p>
+            <a:pPr>
+              <a:spcAft>
+                <a:spcPts val="900"/>
+              </a:spcAft>
+            </a:pPr>
+            <a:r>
+              <a:rPr sz="1050">
+                <a:solidFill>
+                  <a:srgbClr val="445066"/>
+                </a:solidFill>
+                <a:latin typeface="Segoe UI"/>
+              </a:rPr>
+              <a:t>—  Row-level detectors run nightly, never per request</a:t>
+            </a:r>
+          </a:p>
+        </p:txBody>
+      </p:sp>
+      <p:sp>
+        <p:nvSpPr>
+          <p:cNvPr id="22" name="Rounded Rectangle 21"/>
+          <p:cNvSpPr/>
+          <p:nvPr/>
+        </p:nvSpPr>
+        <p:spPr>
+          <a:xfrm>
+            <a:off x="640080" y="5532120"/>
+            <a:ext cx="3474720" cy="868680"/>
+          </a:xfrm>
+          <a:prstGeom prst="roundRect">
+            <a:avLst>
+              <a:gd name="adj" fmla="val 6000"/>
+            </a:avLst>
+          </a:prstGeom>
+          <a:solidFill>
+            <a:srgbClr val="FFFFFF"/>
+          </a:solidFill>
+          <a:ln w="12700">
+            <a:solidFill>
+              <a:srgbClr val="E2E7EF"/>
+            </a:solidFill>
+          </a:ln>
+          <a:effectLst/>
+        </p:spPr>
+        <p:style>
+          <a:lnRef idx="1">
+            <a:schemeClr val="accent1"/>
+          </a:lnRef>
+          <a:fillRef idx="3">
+            <a:schemeClr val="accent1"/>
+          </a:fillRef>
+          <a:effectRef idx="2">
+            <a:schemeClr val="accent1"/>
+          </a:effectRef>
+          <a:fontRef idx="minor">
+            <a:schemeClr val="lt1"/>
+          </a:fontRef>
+        </p:style>
+        <p:txBody>
+          <a:bodyPr rtlCol="0" anchor="ctr"/>
+          <a:lstStyle/>
+          <a:p/>
+        </p:txBody>
+      </p:sp>
+      <p:sp>
+        <p:nvSpPr>
+          <p:cNvPr id="23" name="Rectangle 22"/>
+          <p:cNvSpPr/>
+          <p:nvPr/>
+        </p:nvSpPr>
+        <p:spPr>
+          <a:xfrm>
+            <a:off x="640080" y="5532120"/>
+            <a:ext cx="44450" cy="868680"/>
           </a:xfrm>
           <a:prstGeom prst="rect">
             <a:avLst/>
@@ -13135,156 +13436,538 @@
       </p:sp>
       <p:sp>
         <p:nvSpPr>
-          <p:cNvPr id="16" name="TextBox 15"/>
-          <p:cNvSpPr txBox="1"/>
-          <p:nvPr/>
-        </p:nvSpPr>
-        <p:spPr>
-          <a:xfrm>
-            <a:off x="914400" y="4864608"/>
-            <a:ext cx="2468880" cy="365760"/>
-          </a:xfrm>
-          <a:prstGeom prst="rect">
-            <a:avLst/>
-          </a:prstGeom>
-          <a:noFill/>
-        </p:spPr>
-        <p:txBody>
-          <a:bodyPr wrap="square">
-            <a:spAutoFit/>
-          </a:bodyPr>
-          <a:lstStyle/>
-          <a:p>
-            <a:pPr algn="l">
-              <a:spcAft>
-                <a:spcPts val="400"/>
-              </a:spcAft>
-            </a:pPr>
-            <a:r>
-              <a:rPr sz="1350" b="1">
+          <p:cNvPr id="24" name="TextBox 23"/>
+          <p:cNvSpPr txBox="1"/>
+          <p:nvPr/>
+        </p:nvSpPr>
+        <p:spPr>
+          <a:xfrm>
+            <a:off x="804672" y="5623560"/>
+            <a:ext cx="3200400" cy="256032"/>
+          </a:xfrm>
+          <a:prstGeom prst="rect">
+            <a:avLst/>
+          </a:prstGeom>
+          <a:noFill/>
+        </p:spPr>
+        <p:txBody>
+          <a:bodyPr wrap="square">
+            <a:spAutoFit/>
+          </a:bodyPr>
+          <a:lstStyle/>
+          <a:p>
+            <a:pPr algn="l">
+              <a:spcAft>
+                <a:spcPts val="400"/>
+              </a:spcAft>
+            </a:pPr>
+            <a:r>
+              <a:rPr sz="850" b="1">
+                <a:solidFill>
+                  <a:srgbClr val="7A8599"/>
+                </a:solidFill>
+                <a:latin typeface="Segoe UI"/>
+              </a:rPr>
+              <a:t>PLATFORM RUN COST</a:t>
+            </a:r>
+          </a:p>
+        </p:txBody>
+      </p:sp>
+      <p:sp>
+        <p:nvSpPr>
+          <p:cNvPr id="25" name="TextBox 24"/>
+          <p:cNvSpPr txBox="1"/>
+          <p:nvPr/>
+        </p:nvSpPr>
+        <p:spPr>
+          <a:xfrm>
+            <a:off x="804672" y="5861304"/>
+            <a:ext cx="3200400" cy="457200"/>
+          </a:xfrm>
+          <a:prstGeom prst="rect">
+            <a:avLst/>
+          </a:prstGeom>
+          <a:noFill/>
+        </p:spPr>
+        <p:txBody>
+          <a:bodyPr wrap="square">
+            <a:spAutoFit/>
+          </a:bodyPr>
+          <a:lstStyle/>
+          <a:p>
+            <a:pPr algn="l">
+              <a:spcAft>
+                <a:spcPts val="400"/>
+              </a:spcAft>
+            </a:pPr>
+            <a:r>
+              <a:rPr sz="2200" b="1">
                 <a:solidFill>
                   <a:srgbClr val="0B142A"/>
                 </a:solidFill>
                 <a:latin typeface="Segoe UI"/>
               </a:rPr>
-              <a:t>Zero-code path</a:t>
-            </a:r>
-          </a:p>
-        </p:txBody>
-      </p:sp>
-      <p:sp>
-        <p:nvSpPr>
-          <p:cNvPr id="17" name="TextBox 16"/>
-          <p:cNvSpPr txBox="1"/>
-          <p:nvPr/>
-        </p:nvSpPr>
-        <p:spPr>
-          <a:xfrm>
-            <a:off x="3474720" y="4846320"/>
-            <a:ext cx="7772400" cy="1051560"/>
-          </a:xfrm>
-          <a:prstGeom prst="rect">
-            <a:avLst/>
-          </a:prstGeom>
-          <a:noFill/>
-        </p:spPr>
-        <p:txBody>
-          <a:bodyPr wrap="square">
-            <a:spAutoFit/>
-          </a:bodyPr>
-          <a:lstStyle/>
-          <a:p>
-            <a:pPr>
-              <a:spcAft>
-                <a:spcPts val="900"/>
-              </a:spcAft>
-            </a:pPr>
-            <a:r>
-              <a:rPr sz="1050">
-                <a:solidFill>
-                  <a:srgbClr val="445066"/>
-                </a:solidFill>
-                <a:latin typeface="Segoe UI"/>
-              </a:rPr>
-              <a:t>·  Any FOCUS CSV or Parquet — local, S3, Azure Blob or GCS</a:t>
-            </a:r>
-          </a:p>
-          <a:p>
-            <a:pPr>
-              <a:spcAft>
-                <a:spcPts val="900"/>
-              </a:spcAft>
-            </a:pPr>
-            <a:r>
-              <a:rPr sz="1050">
-                <a:solidFill>
-                  <a:srgbClr val="445066"/>
-                </a:solidFill>
-                <a:latin typeface="Segoe UI"/>
-              </a:rPr>
-              <a:t>·  CloudZero and Vantage emit FOCUS natively</a:t>
-            </a:r>
-          </a:p>
-          <a:p>
-            <a:pPr>
-              <a:spcAft>
-                <a:spcPts val="900"/>
-              </a:spcAft>
-            </a:pPr>
-            <a:r>
-              <a:rPr sz="1050">
-                <a:solidFill>
-                  <a:srgbClr val="445066"/>
-                </a:solidFill>
-                <a:latin typeface="Segoe UI"/>
-              </a:rPr>
-              <a:t>·  Cloudability, CloudHealth and Flexera ingest it</a:t>
-            </a:r>
-          </a:p>
-        </p:txBody>
-      </p:sp>
-      <p:sp>
-        <p:nvSpPr>
-          <p:cNvPr id="18" name="TextBox 17"/>
-          <p:cNvSpPr txBox="1"/>
-          <p:nvPr/>
-        </p:nvSpPr>
-        <p:spPr>
-          <a:xfrm>
-            <a:off x="640080" y="5806440"/>
-            <a:ext cx="10881360" cy="457200"/>
-          </a:xfrm>
-          <a:prstGeom prst="rect">
-            <a:avLst/>
-          </a:prstGeom>
-          <a:noFill/>
-        </p:spPr>
-        <p:txBody>
-          <a:bodyPr wrap="square">
-            <a:spAutoFit/>
-          </a:bodyPr>
-          <a:lstStyle/>
-          <a:p>
-            <a:pPr algn="l">
-              <a:spcAft>
-                <a:spcPts val="400"/>
-              </a:spcAft>
-            </a:pPr>
-            <a:r>
-              <a:rPr sz="1150" b="1">
+              <a:t>~$240 / month</a:t>
+            </a:r>
+          </a:p>
+        </p:txBody>
+      </p:sp>
+      <p:sp>
+        <p:nvSpPr>
+          <p:cNvPr id="26" name="TextBox 25"/>
+          <p:cNvSpPr txBox="1"/>
+          <p:nvPr/>
+        </p:nvSpPr>
+        <p:spPr>
+          <a:xfrm>
+            <a:off x="804672" y="6355080"/>
+            <a:ext cx="3200400" cy="365760"/>
+          </a:xfrm>
+          <a:prstGeom prst="rect">
+            <a:avLst/>
+          </a:prstGeom>
+          <a:noFill/>
+        </p:spPr>
+        <p:txBody>
+          <a:bodyPr wrap="square">
+            <a:spAutoFit/>
+          </a:bodyPr>
+          <a:lstStyle/>
+          <a:p>
+            <a:pPr algn="l">
+              <a:spcAft>
+                <a:spcPts val="400"/>
+              </a:spcAft>
+            </a:pPr>
+            <a:r>
+              <a:rPr sz="900" b="0">
+                <a:solidFill>
+                  <a:srgbClr val="7A8599"/>
+                </a:solidFill>
+                <a:latin typeface="Segoe UI"/>
+              </a:rPr>
+              <a:t>Cloud Run, BigQuery, Cloud SQL, LB</a:t>
+            </a:r>
+          </a:p>
+        </p:txBody>
+      </p:sp>
+      <p:sp>
+        <p:nvSpPr>
+          <p:cNvPr id="27" name="Rounded Rectangle 26"/>
+          <p:cNvSpPr/>
+          <p:nvPr/>
+        </p:nvSpPr>
+        <p:spPr>
+          <a:xfrm>
+            <a:off x="4297680" y="5532120"/>
+            <a:ext cx="3474720" cy="868680"/>
+          </a:xfrm>
+          <a:prstGeom prst="roundRect">
+            <a:avLst>
+              <a:gd name="adj" fmla="val 6000"/>
+            </a:avLst>
+          </a:prstGeom>
+          <a:solidFill>
+            <a:srgbClr val="FFFFFF"/>
+          </a:solidFill>
+          <a:ln w="12700">
+            <a:solidFill>
+              <a:srgbClr val="E2E7EF"/>
+            </a:solidFill>
+          </a:ln>
+          <a:effectLst/>
+        </p:spPr>
+        <p:style>
+          <a:lnRef idx="1">
+            <a:schemeClr val="accent1"/>
+          </a:lnRef>
+          <a:fillRef idx="3">
+            <a:schemeClr val="accent1"/>
+          </a:fillRef>
+          <a:effectRef idx="2">
+            <a:schemeClr val="accent1"/>
+          </a:effectRef>
+          <a:fontRef idx="minor">
+            <a:schemeClr val="lt1"/>
+          </a:fontRef>
+        </p:style>
+        <p:txBody>
+          <a:bodyPr rtlCol="0" anchor="ctr"/>
+          <a:lstStyle/>
+          <a:p/>
+        </p:txBody>
+      </p:sp>
+      <p:sp>
+        <p:nvSpPr>
+          <p:cNvPr id="28" name="Rectangle 27"/>
+          <p:cNvSpPr/>
+          <p:nvPr/>
+        </p:nvSpPr>
+        <p:spPr>
+          <a:xfrm>
+            <a:off x="4297680" y="5532120"/>
+            <a:ext cx="44450" cy="868680"/>
+          </a:xfrm>
+          <a:prstGeom prst="rect">
+            <a:avLst/>
+          </a:prstGeom>
+          <a:solidFill>
+            <a:srgbClr val="5B4BC4"/>
+          </a:solidFill>
+          <a:ln>
+            <a:noFill/>
+          </a:ln>
+          <a:effectLst/>
+        </p:spPr>
+        <p:style>
+          <a:lnRef idx="1">
+            <a:schemeClr val="accent1"/>
+          </a:lnRef>
+          <a:fillRef idx="3">
+            <a:schemeClr val="accent1"/>
+          </a:fillRef>
+          <a:effectRef idx="2">
+            <a:schemeClr val="accent1"/>
+          </a:effectRef>
+          <a:fontRef idx="minor">
+            <a:schemeClr val="lt1"/>
+          </a:fontRef>
+        </p:style>
+        <p:txBody>
+          <a:bodyPr rtlCol="0" anchor="ctr"/>
+          <a:lstStyle/>
+          <a:p>
+            <a:pPr algn="ctr"/>
+          </a:p>
+        </p:txBody>
+      </p:sp>
+      <p:sp>
+        <p:nvSpPr>
+          <p:cNvPr id="29" name="TextBox 28"/>
+          <p:cNvSpPr txBox="1"/>
+          <p:nvPr/>
+        </p:nvSpPr>
+        <p:spPr>
+          <a:xfrm>
+            <a:off x="4462272" y="5623560"/>
+            <a:ext cx="3200400" cy="256032"/>
+          </a:xfrm>
+          <a:prstGeom prst="rect">
+            <a:avLst/>
+          </a:prstGeom>
+          <a:noFill/>
+        </p:spPr>
+        <p:txBody>
+          <a:bodyPr wrap="square">
+            <a:spAutoFit/>
+          </a:bodyPr>
+          <a:lstStyle/>
+          <a:p>
+            <a:pPr algn="l">
+              <a:spcAft>
+                <a:spcPts val="400"/>
+              </a:spcAft>
+            </a:pPr>
+            <a:r>
+              <a:rPr sz="850" b="1">
+                <a:solidFill>
+                  <a:srgbClr val="7A8599"/>
+                </a:solidFill>
+                <a:latin typeface="Segoe UI"/>
+              </a:rPr>
+              <a:t>GEMINI</a:t>
+            </a:r>
+          </a:p>
+        </p:txBody>
+      </p:sp>
+      <p:sp>
+        <p:nvSpPr>
+          <p:cNvPr id="30" name="TextBox 29"/>
+          <p:cNvSpPr txBox="1"/>
+          <p:nvPr/>
+        </p:nvSpPr>
+        <p:spPr>
+          <a:xfrm>
+            <a:off x="4462272" y="5861304"/>
+            <a:ext cx="3200400" cy="457200"/>
+          </a:xfrm>
+          <a:prstGeom prst="rect">
+            <a:avLst/>
+          </a:prstGeom>
+          <a:noFill/>
+        </p:spPr>
+        <p:txBody>
+          <a:bodyPr wrap="square">
+            <a:spAutoFit/>
+          </a:bodyPr>
+          <a:lstStyle/>
+          <a:p>
+            <a:pPr algn="l">
+              <a:spcAft>
+                <a:spcPts val="400"/>
+              </a:spcAft>
+            </a:pPr>
+            <a:r>
+              <a:rPr sz="2200" b="1">
                 <a:solidFill>
                   <a:srgbClr val="0B142A"/>
                 </a:solidFill>
                 <a:latin typeface="Segoe UI"/>
               </a:rPr>
-              <a:t>Adopting a new tool is one Connector subclass and one registry line. Nothing downstream changes.</a:t>
-            </a:r>
-          </a:p>
-        </p:txBody>
-      </p:sp>
-      <p:sp>
-        <p:nvSpPr>
-          <p:cNvPr id="19" name="TextBox 18"/>
+              <a:t>~$117 / month</a:t>
+            </a:r>
+          </a:p>
+        </p:txBody>
+      </p:sp>
+      <p:sp>
+        <p:nvSpPr>
+          <p:cNvPr id="31" name="TextBox 30"/>
+          <p:cNvSpPr txBox="1"/>
+          <p:nvPr/>
+        </p:nvSpPr>
+        <p:spPr>
+          <a:xfrm>
+            <a:off x="4462272" y="6355080"/>
+            <a:ext cx="3200400" cy="365760"/>
+          </a:xfrm>
+          <a:prstGeom prst="rect">
+            <a:avLst/>
+          </a:prstGeom>
+          <a:noFill/>
+        </p:spPr>
+        <p:txBody>
+          <a:bodyPr wrap="square">
+            <a:spAutoFit/>
+          </a:bodyPr>
+          <a:lstStyle/>
+          <a:p>
+            <a:pPr algn="l">
+              <a:spcAft>
+                <a:spcPts val="400"/>
+              </a:spcAft>
+            </a:pPr>
+            <a:r>
+              <a:rPr sz="900" b="0">
+                <a:solidFill>
+                  <a:srgbClr val="7A8599"/>
+                </a:solidFill>
+                <a:latin typeface="Segoe UI"/>
+              </a:rPr>
+              <a:t>4,400 questions; ~$0.027 each</a:t>
+            </a:r>
+          </a:p>
+        </p:txBody>
+      </p:sp>
+      <p:sp>
+        <p:nvSpPr>
+          <p:cNvPr id="32" name="Rounded Rectangle 31"/>
+          <p:cNvSpPr/>
+          <p:nvPr/>
+        </p:nvSpPr>
+        <p:spPr>
+          <a:xfrm>
+            <a:off x="7955279" y="5532120"/>
+            <a:ext cx="3566160" cy="868680"/>
+          </a:xfrm>
+          <a:prstGeom prst="roundRect">
+            <a:avLst>
+              <a:gd name="adj" fmla="val 6000"/>
+            </a:avLst>
+          </a:prstGeom>
+          <a:solidFill>
+            <a:srgbClr val="FFFFFF"/>
+          </a:solidFill>
+          <a:ln w="12700">
+            <a:solidFill>
+              <a:srgbClr val="E2E7EF"/>
+            </a:solidFill>
+          </a:ln>
+          <a:effectLst/>
+        </p:spPr>
+        <p:style>
+          <a:lnRef idx="1">
+            <a:schemeClr val="accent1"/>
+          </a:lnRef>
+          <a:fillRef idx="3">
+            <a:schemeClr val="accent1"/>
+          </a:fillRef>
+          <a:effectRef idx="2">
+            <a:schemeClr val="accent1"/>
+          </a:effectRef>
+          <a:fontRef idx="minor">
+            <a:schemeClr val="lt1"/>
+          </a:fontRef>
+        </p:style>
+        <p:txBody>
+          <a:bodyPr rtlCol="0" anchor="ctr"/>
+          <a:lstStyle/>
+          <a:p/>
+        </p:txBody>
+      </p:sp>
+      <p:sp>
+        <p:nvSpPr>
+          <p:cNvPr id="33" name="Rectangle 32"/>
+          <p:cNvSpPr/>
+          <p:nvPr/>
+        </p:nvSpPr>
+        <p:spPr>
+          <a:xfrm>
+            <a:off x="7955279" y="5532120"/>
+            <a:ext cx="44450" cy="868680"/>
+          </a:xfrm>
+          <a:prstGeom prst="rect">
+            <a:avLst/>
+          </a:prstGeom>
+          <a:solidFill>
+            <a:srgbClr val="0C7A3E"/>
+          </a:solidFill>
+          <a:ln>
+            <a:noFill/>
+          </a:ln>
+          <a:effectLst/>
+        </p:spPr>
+        <p:style>
+          <a:lnRef idx="1">
+            <a:schemeClr val="accent1"/>
+          </a:lnRef>
+          <a:fillRef idx="3">
+            <a:schemeClr val="accent1"/>
+          </a:fillRef>
+          <a:effectRef idx="2">
+            <a:schemeClr val="accent1"/>
+          </a:effectRef>
+          <a:fontRef idx="minor">
+            <a:schemeClr val="lt1"/>
+          </a:fontRef>
+        </p:style>
+        <p:txBody>
+          <a:bodyPr rtlCol="0" anchor="ctr"/>
+          <a:lstStyle/>
+          <a:p>
+            <a:pPr algn="ctr"/>
+          </a:p>
+        </p:txBody>
+      </p:sp>
+      <p:sp>
+        <p:nvSpPr>
+          <p:cNvPr id="34" name="TextBox 33"/>
+          <p:cNvSpPr txBox="1"/>
+          <p:nvPr/>
+        </p:nvSpPr>
+        <p:spPr>
+          <a:xfrm>
+            <a:off x="8119871" y="5623560"/>
+            <a:ext cx="3291840" cy="256032"/>
+          </a:xfrm>
+          <a:prstGeom prst="rect">
+            <a:avLst/>
+          </a:prstGeom>
+          <a:noFill/>
+        </p:spPr>
+        <p:txBody>
+          <a:bodyPr wrap="square">
+            <a:spAutoFit/>
+          </a:bodyPr>
+          <a:lstStyle/>
+          <a:p>
+            <a:pPr algn="l">
+              <a:spcAft>
+                <a:spcPts val="400"/>
+              </a:spcAft>
+            </a:pPr>
+            <a:r>
+              <a:rPr sz="850" b="1">
+                <a:solidFill>
+                  <a:srgbClr val="7A8599"/>
+                </a:solidFill>
+                <a:latin typeface="Segoe UI"/>
+              </a:rPr>
+              <a:t>SHARE OF ESTATE</a:t>
+            </a:r>
+          </a:p>
+        </p:txBody>
+      </p:sp>
+      <p:sp>
+        <p:nvSpPr>
+          <p:cNvPr id="35" name="TextBox 34"/>
+          <p:cNvSpPr txBox="1"/>
+          <p:nvPr/>
+        </p:nvSpPr>
+        <p:spPr>
+          <a:xfrm>
+            <a:off x="8119871" y="5861304"/>
+            <a:ext cx="3291840" cy="457200"/>
+          </a:xfrm>
+          <a:prstGeom prst="rect">
+            <a:avLst/>
+          </a:prstGeom>
+          <a:noFill/>
+        </p:spPr>
+        <p:txBody>
+          <a:bodyPr wrap="square">
+            <a:spAutoFit/>
+          </a:bodyPr>
+          <a:lstStyle/>
+          <a:p>
+            <a:pPr algn="l">
+              <a:spcAft>
+                <a:spcPts val="400"/>
+              </a:spcAft>
+            </a:pPr>
+            <a:r>
+              <a:rPr sz="2200" b="1">
+                <a:solidFill>
+                  <a:srgbClr val="0B142A"/>
+                </a:solidFill>
+                <a:latin typeface="Segoe UI"/>
+              </a:rPr>
+              <a:t>0.0005%</a:t>
+            </a:r>
+          </a:p>
+        </p:txBody>
+      </p:sp>
+      <p:sp>
+        <p:nvSpPr>
+          <p:cNvPr id="36" name="TextBox 35"/>
+          <p:cNvSpPr txBox="1"/>
+          <p:nvPr/>
+        </p:nvSpPr>
+        <p:spPr>
+          <a:xfrm>
+            <a:off x="8119871" y="6355080"/>
+            <a:ext cx="3291840" cy="365760"/>
+          </a:xfrm>
+          <a:prstGeom prst="rect">
+            <a:avLst/>
+          </a:prstGeom>
+          <a:noFill/>
+        </p:spPr>
+        <p:txBody>
+          <a:bodyPr wrap="square">
+            <a:spAutoFit/>
+          </a:bodyPr>
+          <a:lstStyle/>
+          <a:p>
+            <a:pPr algn="l">
+              <a:spcAft>
+                <a:spcPts val="400"/>
+              </a:spcAft>
+            </a:pPr>
+            <a:r>
+              <a:rPr sz="900" b="0">
+                <a:solidFill>
+                  <a:srgbClr val="7A8599"/>
+                </a:solidFill>
+                <a:latin typeface="Segoe UI"/>
+              </a:rPr>
+              <a:t>of the $30.28M under management</a:t>
+            </a:r>
+          </a:p>
+        </p:txBody>
+      </p:sp>
+      <p:sp>
+        <p:nvSpPr>
+          <p:cNvPr id="37" name="TextBox 36"/>
           <p:cNvSpPr txBox="1"/>
           <p:nvPr/>
         </p:nvSpPr>
@@ -13309,12 +13992,21 @@
                 <a:spcPts val="400"/>
               </a:spcAft>
             </a:pPr>
-          </a:p>
-        </p:txBody>
-      </p:sp>
-      <p:sp>
-        <p:nvSpPr>
-          <p:cNvPr id="20" name="TextBox 19"/>
+            <a:r>
+              <a:rPr sz="850" b="0">
+                <a:solidFill>
+                  <a:srgbClr val="7A8599"/>
+                </a:solidFill>
+                <a:latin typeface="Segoe UI"/>
+              </a:rPr>
+              <a:t>Cost estimates. Gemini priced at gemini-3.5-flash / gemini-3.1-flash-lite list rates, July 2026.</a:t>
+            </a:r>
+          </a:p>
+        </p:txBody>
+      </p:sp>
+      <p:sp>
+        <p:nvSpPr>
+          <p:cNvPr id="38" name="TextBox 37"/>
           <p:cNvSpPr txBox="1"/>
           <p:nvPr/>
         </p:nvSpPr>
@@ -13403,7 +14095,7 @@
                 </a:solidFill>
                 <a:latin typeface="Segoe UI"/>
               </a:rPr>
-              <a:t>DELIVERY</a:t>
+              <a:t>VENDOR NEUTRALITY</a:t>
             </a:r>
           </a:p>
         </p:txBody>
@@ -13442,7 +14134,7 @@
                 </a:solidFill>
                 <a:latin typeface="Segoe UI"/>
               </a:rPr>
-              <a:t>A phased rollout, value in the first wave</a:t>
+              <a:t>17 connectors, one schema</a:t>
             </a:r>
           </a:p>
         </p:txBody>
@@ -13481,7 +14173,7 @@
                 </a:solidFill>
                 <a:latin typeface="Segoe UI"/>
               </a:rPr>
-              <a:t>Sequenced by effort and risk, not by dollar size</a:t>
+              <a:t>Whatever Con Edison procures, the dashboards do not change</a:t>
             </a:r>
           </a:p>
         </p:txBody>
@@ -13538,8 +14230,8 @@
         </p:nvSpPr>
         <p:spPr>
           <a:xfrm>
-            <a:off x="640080" y="1965960"/>
-            <a:ext cx="3502152" cy="3749039"/>
+            <a:off x="640080" y="2011680"/>
+            <a:ext cx="10881360" cy="1234440"/>
           </a:xfrm>
           <a:prstGeom prst="roundRect">
             <a:avLst>
@@ -13584,14 +14276,14 @@
         </p:nvSpPr>
         <p:spPr>
           <a:xfrm>
-            <a:off x="640080" y="1965960"/>
-            <a:ext cx="3502152" cy="50800"/>
+            <a:off x="640080" y="2011680"/>
+            <a:ext cx="50800" cy="1234440"/>
           </a:xfrm>
           <a:prstGeom prst="rect">
             <a:avLst/>
           </a:prstGeom>
           <a:solidFill>
-            <a:srgbClr val="0C7A3E"/>
+            <a:srgbClr val="1E6FD9"/>
           </a:solidFill>
           <a:ln>
             <a:noFill/>
@@ -13628,33 +14320,33 @@
         </p:nvSpPr>
         <p:spPr>
           <a:xfrm>
-            <a:off x="841248" y="2121408"/>
-            <a:ext cx="3108960" cy="320040"/>
-          </a:xfrm>
-          <a:prstGeom prst="rect">
-            <a:avLst/>
-          </a:prstGeom>
-          <a:noFill/>
-        </p:spPr>
-        <p:txBody>
-          <a:bodyPr wrap="square">
-            <a:spAutoFit/>
-          </a:bodyPr>
-          <a:lstStyle/>
-          <a:p>
-            <a:pPr algn="l">
-              <a:spcAft>
-                <a:spcPts val="400"/>
-              </a:spcAft>
-            </a:pPr>
-            <a:r>
-              <a:rPr sz="1150" b="1">
+            <a:off x="914400" y="2121408"/>
+            <a:ext cx="2468880" cy="365760"/>
+          </a:xfrm>
+          <a:prstGeom prst="rect">
+            <a:avLst/>
+          </a:prstGeom>
+          <a:noFill/>
+        </p:spPr>
+        <p:txBody>
+          <a:bodyPr wrap="square">
+            <a:spAutoFit/>
+          </a:bodyPr>
+          <a:lstStyle/>
+          <a:p>
+            <a:pPr algn="l">
+              <a:spcAft>
+                <a:spcPts val="400"/>
+              </a:spcAft>
+            </a:pPr>
+            <a:r>
+              <a:rPr sz="1350" b="1">
                 <a:solidFill>
                   <a:srgbClr val="0B142A"/>
                 </a:solidFill>
                 <a:latin typeface="Segoe UI"/>
               </a:rPr>
-              <a:t>Wave 1 · Weeks 1–4</a:t>
+              <a:t>Native cloud</a:t>
             </a:r>
           </a:p>
         </p:txBody>
@@ -13667,47 +14359,8 @@
         </p:nvSpPr>
         <p:spPr>
           <a:xfrm>
-            <a:off x="841248" y="2432304"/>
-            <a:ext cx="3108960" cy="274320"/>
-          </a:xfrm>
-          <a:prstGeom prst="rect">
-            <a:avLst/>
-          </a:prstGeom>
-          <a:noFill/>
-        </p:spPr>
-        <p:txBody>
-          <a:bodyPr wrap="square">
-            <a:spAutoFit/>
-          </a:bodyPr>
-          <a:lstStyle/>
-          <a:p>
-            <a:pPr algn="l">
-              <a:spcAft>
-                <a:spcPts val="400"/>
-              </a:spcAft>
-            </a:pPr>
-            <a:r>
-              <a:rPr sz="950" b="1">
-                <a:solidFill>
-                  <a:srgbClr val="0C7A3E"/>
-                </a:solidFill>
-                <a:latin typeface="Segoe UI"/>
-              </a:rPr>
-              <a:t>FinOps phase: Inform</a:t>
-            </a:r>
-          </a:p>
-        </p:txBody>
-      </p:sp>
-      <p:sp>
-        <p:nvSpPr>
-          <p:cNvPr id="10" name="TextBox 9"/>
-          <p:cNvSpPr txBox="1"/>
-          <p:nvPr/>
-        </p:nvSpPr>
-        <p:spPr>
-          <a:xfrm>
-            <a:off x="841248" y="2788920"/>
-            <a:ext cx="3108960" cy="2743200"/>
+            <a:off x="3474720" y="2103120"/>
+            <a:ext cx="7772400" cy="1051560"/>
           </a:xfrm>
           <a:prstGeom prst="rect">
             <a:avLst/>
@@ -13732,7 +14385,7 @@
                 </a:solidFill>
                 <a:latin typeface="Segoe UI"/>
               </a:rPr>
-              <a:t>—  Connect payers; validate FOCUS conformance</a:t>
+              <a:t>·  AWS — Data Exports (FOCUS 1.2), Cost Explorer, Cost Optimization Hub</a:t>
             </a:r>
           </a:p>
           <a:p>
@@ -13748,7 +14401,7 @@
                 </a:solidFill>
                 <a:latin typeface="Segoe UI"/>
               </a:rPr>
-              <a:t>—  Stand up the executive view and showback</a:t>
+              <a:t>·  Azure — Cost Management, FocusCost exports, Advisor</a:t>
             </a:r>
           </a:p>
           <a:p>
@@ -13764,37 +14417,21 @@
                 </a:solidFill>
                 <a:latin typeface="Segoe UI"/>
               </a:rPr>
-              <a:t>—  Baseline the estate; publish allocation coverage</a:t>
-            </a:r>
-          </a:p>
-          <a:p>
-            <a:pPr>
-              <a:spcAft>
-                <a:spcPts val="900"/>
-              </a:spcAft>
-            </a:pPr>
-            <a:r>
-              <a:rPr sz="1050">
-                <a:solidFill>
-                  <a:srgbClr val="445066"/>
-                </a:solidFill>
-                <a:latin typeface="Segoe UI"/>
-              </a:rPr>
-              <a:t>—  Quick wins: idle resources, gp2→gp3, orphaned snapshots</a:t>
-            </a:r>
-          </a:p>
-        </p:txBody>
-      </p:sp>
-      <p:sp>
-        <p:nvSpPr>
-          <p:cNvPr id="11" name="Rounded Rectangle 10"/>
+              <a:t>·  GCP — BigQuery billing export, Recommender, Budgets</a:t>
+            </a:r>
+          </a:p>
+        </p:txBody>
+      </p:sp>
+      <p:sp>
+        <p:nvSpPr>
+          <p:cNvPr id="10" name="Rounded Rectangle 9"/>
           <p:cNvSpPr/>
           <p:nvPr/>
         </p:nvSpPr>
         <p:spPr>
           <a:xfrm>
-            <a:off x="4315967" y="1965960"/>
-            <a:ext cx="3502152" cy="3749039"/>
+            <a:off x="640080" y="3383280"/>
+            <a:ext cx="10881360" cy="1234440"/>
           </a:xfrm>
           <a:prstGeom prst="roundRect">
             <a:avLst>
@@ -13833,20 +14470,20 @@
       </p:sp>
       <p:sp>
         <p:nvSpPr>
-          <p:cNvPr id="12" name="Rectangle 11"/>
+          <p:cNvPr id="11" name="Rectangle 10"/>
           <p:cNvSpPr/>
           <p:nvPr/>
         </p:nvSpPr>
         <p:spPr>
           <a:xfrm>
-            <a:off x="4315967" y="1965960"/>
-            <a:ext cx="3502152" cy="50800"/>
+            <a:off x="640080" y="3383280"/>
+            <a:ext cx="50800" cy="1234440"/>
           </a:xfrm>
           <a:prstGeom prst="rect">
             <a:avLst/>
           </a:prstGeom>
           <a:solidFill>
-            <a:srgbClr val="1E6FD9"/>
+            <a:srgbClr val="5B4BC4"/>
           </a:solidFill>
           <a:ln>
             <a:noFill/>
@@ -13877,92 +14514,53 @@
       </p:sp>
       <p:sp>
         <p:nvSpPr>
+          <p:cNvPr id="12" name="TextBox 11"/>
+          <p:cNvSpPr txBox="1"/>
+          <p:nvPr/>
+        </p:nvSpPr>
+        <p:spPr>
+          <a:xfrm>
+            <a:off x="914400" y="3493008"/>
+            <a:ext cx="2468880" cy="365760"/>
+          </a:xfrm>
+          <a:prstGeom prst="rect">
+            <a:avLst/>
+          </a:prstGeom>
+          <a:noFill/>
+        </p:spPr>
+        <p:txBody>
+          <a:bodyPr wrap="square">
+            <a:spAutoFit/>
+          </a:bodyPr>
+          <a:lstStyle/>
+          <a:p>
+            <a:pPr algn="l">
+              <a:spcAft>
+                <a:spcPts val="400"/>
+              </a:spcAft>
+            </a:pPr>
+            <a:r>
+              <a:rPr sz="1350" b="1">
+                <a:solidFill>
+                  <a:srgbClr val="0B142A"/>
+                </a:solidFill>
+                <a:latin typeface="Segoe UI"/>
+              </a:rPr>
+              <a:t>Procured platforms</a:t>
+            </a:r>
+          </a:p>
+        </p:txBody>
+      </p:sp>
+      <p:sp>
+        <p:nvSpPr>
           <p:cNvPr id="13" name="TextBox 12"/>
           <p:cNvSpPr txBox="1"/>
           <p:nvPr/>
         </p:nvSpPr>
         <p:spPr>
           <a:xfrm>
-            <a:off x="4517135" y="2121408"/>
-            <a:ext cx="3108960" cy="320040"/>
-          </a:xfrm>
-          <a:prstGeom prst="rect">
-            <a:avLst/>
-          </a:prstGeom>
-          <a:noFill/>
-        </p:spPr>
-        <p:txBody>
-          <a:bodyPr wrap="square">
-            <a:spAutoFit/>
-          </a:bodyPr>
-          <a:lstStyle/>
-          <a:p>
-            <a:pPr algn="l">
-              <a:spcAft>
-                <a:spcPts val="400"/>
-              </a:spcAft>
-            </a:pPr>
-            <a:r>
-              <a:rPr sz="1150" b="1">
-                <a:solidFill>
-                  <a:srgbClr val="0B142A"/>
-                </a:solidFill>
-                <a:latin typeface="Segoe UI"/>
-              </a:rPr>
-              <a:t>Wave 2 · Weeks 5–12</a:t>
-            </a:r>
-          </a:p>
-        </p:txBody>
-      </p:sp>
-      <p:sp>
-        <p:nvSpPr>
-          <p:cNvPr id="14" name="TextBox 13"/>
-          <p:cNvSpPr txBox="1"/>
-          <p:nvPr/>
-        </p:nvSpPr>
-        <p:spPr>
-          <a:xfrm>
-            <a:off x="4517135" y="2432304"/>
-            <a:ext cx="3108960" cy="274320"/>
-          </a:xfrm>
-          <a:prstGeom prst="rect">
-            <a:avLst/>
-          </a:prstGeom>
-          <a:noFill/>
-        </p:spPr>
-        <p:txBody>
-          <a:bodyPr wrap="square">
-            <a:spAutoFit/>
-          </a:bodyPr>
-          <a:lstStyle/>
-          <a:p>
-            <a:pPr algn="l">
-              <a:spcAft>
-                <a:spcPts val="400"/>
-              </a:spcAft>
-            </a:pPr>
-            <a:r>
-              <a:rPr sz="950" b="1">
-                <a:solidFill>
-                  <a:srgbClr val="1E6FD9"/>
-                </a:solidFill>
-                <a:latin typeface="Segoe UI"/>
-              </a:rPr>
-              <a:t>FinOps phase: Optimize</a:t>
-            </a:r>
-          </a:p>
-        </p:txBody>
-      </p:sp>
-      <p:sp>
-        <p:nvSpPr>
-          <p:cNvPr id="15" name="TextBox 14"/>
-          <p:cNvSpPr txBox="1"/>
-          <p:nvPr/>
-        </p:nvSpPr>
-        <p:spPr>
-          <a:xfrm>
-            <a:off x="4517135" y="2788920"/>
-            <a:ext cx="3108960" cy="2743200"/>
+            <a:off x="3474720" y="3474720"/>
+            <a:ext cx="7772400" cy="1051560"/>
           </a:xfrm>
           <a:prstGeom prst="rect">
             <a:avLst/>
@@ -13987,7 +14585,7 @@
                 </a:solidFill>
                 <a:latin typeface="Segoe UI"/>
               </a:rPr>
-              <a:t>—  Tagging remediation to cross the chargeback line</a:t>
+              <a:t>·  Apptio Cloudability · Tanzu CloudHealth · Flexera One</a:t>
             </a:r>
           </a:p>
           <a:p>
@@ -14003,7 +14601,7 @@
                 </a:solidFill>
                 <a:latin typeface="Segoe UI"/>
               </a:rPr>
-              <a:t>—  Commitment strategy: coverage to the sustained floor</a:t>
+              <a:t>·  Finout · Vantage · CloudZero · Harness CCM · nOps</a:t>
             </a:r>
           </a:p>
           <a:p>
@@ -14019,37 +14617,21 @@
                 </a:solidFill>
                 <a:latin typeface="Segoe UI"/>
               </a:rPr>
-              <a:t>—  Non-prod scheduling; previous-generation migration</a:t>
-            </a:r>
-          </a:p>
-          <a:p>
-            <a:pPr>
-              <a:spcAft>
-                <a:spcPts val="900"/>
-              </a:spcAft>
-            </a:pPr>
-            <a:r>
-              <a:rPr sz="1050">
-                <a:solidFill>
-                  <a:srgbClr val="445066"/>
-                </a:solidFill>
-                <a:latin typeface="Segoe UI"/>
-              </a:rPr>
-              <a:t>—  Forecast vs budget in the monthly finance cycle</a:t>
-            </a:r>
-          </a:p>
-        </p:txBody>
-      </p:sp>
-      <p:sp>
-        <p:nvSpPr>
-          <p:cNvPr id="16" name="Rounded Rectangle 15"/>
+              <a:t>·  Kubecost · OpenCost · IBM Turbonomic · ServiceNow</a:t>
+            </a:r>
+          </a:p>
+        </p:txBody>
+      </p:sp>
+      <p:sp>
+        <p:nvSpPr>
+          <p:cNvPr id="14" name="Rounded Rectangle 13"/>
           <p:cNvSpPr/>
           <p:nvPr/>
         </p:nvSpPr>
         <p:spPr>
           <a:xfrm>
-            <a:off x="7991854" y="1965960"/>
-            <a:ext cx="3502152" cy="3749039"/>
+            <a:off x="640080" y="4754880"/>
+            <a:ext cx="10881360" cy="1234440"/>
           </a:xfrm>
           <a:prstGeom prst="roundRect">
             <a:avLst>
@@ -14088,20 +14670,20 @@
       </p:sp>
       <p:sp>
         <p:nvSpPr>
-          <p:cNvPr id="17" name="Rectangle 16"/>
+          <p:cNvPr id="15" name="Rectangle 14"/>
           <p:cNvSpPr/>
           <p:nvPr/>
         </p:nvSpPr>
         <p:spPr>
           <a:xfrm>
-            <a:off x="7991854" y="1965960"/>
-            <a:ext cx="3502152" cy="50800"/>
+            <a:off x="640080" y="4754880"/>
+            <a:ext cx="50800" cy="1234440"/>
           </a:xfrm>
           <a:prstGeom prst="rect">
             <a:avLst/>
           </a:prstGeom>
           <a:solidFill>
-            <a:srgbClr val="5B4BC4"/>
+            <a:srgbClr val="119B8A"/>
           </a:solidFill>
           <a:ln>
             <a:noFill/>
@@ -14132,14 +14714,124 @@
       </p:sp>
       <p:sp>
         <p:nvSpPr>
+          <p:cNvPr id="16" name="TextBox 15"/>
+          <p:cNvSpPr txBox="1"/>
+          <p:nvPr/>
+        </p:nvSpPr>
+        <p:spPr>
+          <a:xfrm>
+            <a:off x="914400" y="4864608"/>
+            <a:ext cx="2468880" cy="365760"/>
+          </a:xfrm>
+          <a:prstGeom prst="rect">
+            <a:avLst/>
+          </a:prstGeom>
+          <a:noFill/>
+        </p:spPr>
+        <p:txBody>
+          <a:bodyPr wrap="square">
+            <a:spAutoFit/>
+          </a:bodyPr>
+          <a:lstStyle/>
+          <a:p>
+            <a:pPr algn="l">
+              <a:spcAft>
+                <a:spcPts val="400"/>
+              </a:spcAft>
+            </a:pPr>
+            <a:r>
+              <a:rPr sz="1350" b="1">
+                <a:solidFill>
+                  <a:srgbClr val="0B142A"/>
+                </a:solidFill>
+                <a:latin typeface="Segoe UI"/>
+              </a:rPr>
+              <a:t>Zero-code path</a:t>
+            </a:r>
+          </a:p>
+        </p:txBody>
+      </p:sp>
+      <p:sp>
+        <p:nvSpPr>
+          <p:cNvPr id="17" name="TextBox 16"/>
+          <p:cNvSpPr txBox="1"/>
+          <p:nvPr/>
+        </p:nvSpPr>
+        <p:spPr>
+          <a:xfrm>
+            <a:off x="3474720" y="4846320"/>
+            <a:ext cx="7772400" cy="1051560"/>
+          </a:xfrm>
+          <a:prstGeom prst="rect">
+            <a:avLst/>
+          </a:prstGeom>
+          <a:noFill/>
+        </p:spPr>
+        <p:txBody>
+          <a:bodyPr wrap="square">
+            <a:spAutoFit/>
+          </a:bodyPr>
+          <a:lstStyle/>
+          <a:p>
+            <a:pPr>
+              <a:spcAft>
+                <a:spcPts val="900"/>
+              </a:spcAft>
+            </a:pPr>
+            <a:r>
+              <a:rPr sz="1050">
+                <a:solidFill>
+                  <a:srgbClr val="445066"/>
+                </a:solidFill>
+                <a:latin typeface="Segoe UI"/>
+              </a:rPr>
+              <a:t>·  Any FOCUS CSV or Parquet — local, S3, Azure Blob or GCS</a:t>
+            </a:r>
+          </a:p>
+          <a:p>
+            <a:pPr>
+              <a:spcAft>
+                <a:spcPts val="900"/>
+              </a:spcAft>
+            </a:pPr>
+            <a:r>
+              <a:rPr sz="1050">
+                <a:solidFill>
+                  <a:srgbClr val="445066"/>
+                </a:solidFill>
+                <a:latin typeface="Segoe UI"/>
+              </a:rPr>
+              <a:t>·  CloudZero and Vantage emit FOCUS natively</a:t>
+            </a:r>
+          </a:p>
+          <a:p>
+            <a:pPr>
+              <a:spcAft>
+                <a:spcPts val="900"/>
+              </a:spcAft>
+            </a:pPr>
+            <a:r>
+              <a:rPr sz="1050">
+                <a:solidFill>
+                  <a:srgbClr val="445066"/>
+                </a:solidFill>
+                <a:latin typeface="Segoe UI"/>
+              </a:rPr>
+              <a:t>·  Cloudability, CloudHealth and Flexera ingest it</a:t>
+            </a:r>
+          </a:p>
+        </p:txBody>
+      </p:sp>
+      <p:sp>
+        <p:nvSpPr>
           <p:cNvPr id="18" name="TextBox 17"/>
           <p:cNvSpPr txBox="1"/>
           <p:nvPr/>
         </p:nvSpPr>
         <p:spPr>
           <a:xfrm>
-            <a:off x="8193022" y="2121408"/>
-            <a:ext cx="3108960" cy="320040"/>
+            <a:off x="640080" y="5806440"/>
+            <a:ext cx="10881360" cy="457200"/>
           </a:xfrm>
           <a:prstGeom prst="rect">
             <a:avLst/>
@@ -14164,7 +14856,7 @@
                 </a:solidFill>
                 <a:latin typeface="Segoe UI"/>
               </a:rPr>
-              <a:t>Wave 3 · Quarter 2+</a:t>
+              <a:t>Adopting a new tool is one Connector subclass and one registry line. Nothing downstream changes.</a:t>
             </a:r>
           </a:p>
         </p:txBody>
@@ -14172,171 +14864,6 @@
       <p:sp>
         <p:nvSpPr>
           <p:cNvPr id="19" name="TextBox 18"/>
-          <p:cNvSpPr txBox="1"/>
-          <p:nvPr/>
-        </p:nvSpPr>
-        <p:spPr>
-          <a:xfrm>
-            <a:off x="8193022" y="2432304"/>
-            <a:ext cx="3108960" cy="274320"/>
-          </a:xfrm>
-          <a:prstGeom prst="rect">
-            <a:avLst/>
-          </a:prstGeom>
-          <a:noFill/>
-        </p:spPr>
-        <p:txBody>
-          <a:bodyPr wrap="square">
-            <a:spAutoFit/>
-          </a:bodyPr>
-          <a:lstStyle/>
-          <a:p>
-            <a:pPr algn="l">
-              <a:spcAft>
-                <a:spcPts val="400"/>
-              </a:spcAft>
-            </a:pPr>
-            <a:r>
-              <a:rPr sz="950" b="1">
-                <a:solidFill>
-                  <a:srgbClr val="5B4BC4"/>
-                </a:solidFill>
-                <a:latin typeface="Segoe UI"/>
-              </a:rPr>
-              <a:t>FinOps phase: Operate</a:t>
-            </a:r>
-          </a:p>
-        </p:txBody>
-      </p:sp>
-      <p:sp>
-        <p:nvSpPr>
-          <p:cNvPr id="20" name="TextBox 19"/>
-          <p:cNvSpPr txBox="1"/>
-          <p:nvPr/>
-        </p:nvSpPr>
-        <p:spPr>
-          <a:xfrm>
-            <a:off x="8193022" y="2788920"/>
-            <a:ext cx="3108960" cy="2743200"/>
-          </a:xfrm>
-          <a:prstGeom prst="rect">
-            <a:avLst/>
-          </a:prstGeom>
-          <a:noFill/>
-        </p:spPr>
-        <p:txBody>
-          <a:bodyPr wrap="square">
-            <a:spAutoFit/>
-          </a:bodyPr>
-          <a:lstStyle/>
-          <a:p>
-            <a:pPr>
-              <a:spcAft>
-                <a:spcPts val="900"/>
-              </a:spcAft>
-            </a:pPr>
-            <a:r>
-              <a:rPr sz="1050">
-                <a:solidFill>
-                  <a:srgbClr val="445066"/>
-                </a:solidFill>
-                <a:latin typeface="Segoe UI"/>
-              </a:rPr>
-              <a:t>—  Chargeback with the agreed shared-cost policy</a:t>
-            </a:r>
-          </a:p>
-          <a:p>
-            <a:pPr>
-              <a:spcAft>
-                <a:spcPts val="900"/>
-              </a:spcAft>
-            </a:pPr>
-            <a:r>
-              <a:rPr sz="1050">
-                <a:solidFill>
-                  <a:srgbClr val="445066"/>
-                </a:solidFill>
-                <a:latin typeface="Segoe UI"/>
-              </a:rPr>
-              <a:t>—  Unit economics per customer, per kWh, per meter read</a:t>
-            </a:r>
-          </a:p>
-          <a:p>
-            <a:pPr>
-              <a:spcAft>
-                <a:spcPts val="900"/>
-              </a:spcAft>
-            </a:pPr>
-            <a:r>
-              <a:rPr sz="1050">
-                <a:solidFill>
-                  <a:srgbClr val="445066"/>
-                </a:solidFill>
-                <a:latin typeface="Segoe UI"/>
-              </a:rPr>
-              <a:t>—  Anomaly alerting into ServiceNow</a:t>
-            </a:r>
-          </a:p>
-          <a:p>
-            <a:pPr>
-              <a:spcAft>
-                <a:spcPts val="900"/>
-              </a:spcAft>
-            </a:pPr>
-            <a:r>
-              <a:rPr sz="1050">
-                <a:solidFill>
-                  <a:srgbClr val="445066"/>
-                </a:solidFill>
-                <a:latin typeface="Segoe UI"/>
-              </a:rPr>
-              <a:t>—  AI Copilot for self-service, FinOps for AI/GPU spend</a:t>
-            </a:r>
-          </a:p>
-        </p:txBody>
-      </p:sp>
-      <p:sp>
-        <p:nvSpPr>
-          <p:cNvPr id="21" name="TextBox 20"/>
-          <p:cNvSpPr txBox="1"/>
-          <p:nvPr/>
-        </p:nvSpPr>
-        <p:spPr>
-          <a:xfrm>
-            <a:off x="640080" y="5897880"/>
-            <a:ext cx="10881360" cy="365760"/>
-          </a:xfrm>
-          <a:prstGeom prst="rect">
-            <a:avLst/>
-          </a:prstGeom>
-          <a:noFill/>
-        </p:spPr>
-        <p:txBody>
-          <a:bodyPr wrap="square">
-            <a:spAutoFit/>
-          </a:bodyPr>
-          <a:lstStyle/>
-          <a:p>
-            <a:pPr algn="l">
-              <a:spcAft>
-                <a:spcPts val="400"/>
-              </a:spcAft>
-            </a:pPr>
-            <a:r>
-              <a:rPr sz="1100" b="1">
-                <a:solidFill>
-                  <a:srgbClr val="0B142A"/>
-                </a:solidFill>
-                <a:latin typeface="Segoe UI"/>
-              </a:rPr>
-              <a:t>Wave 1 is deliberately all low-effort, low-risk levers — the programme should pay for itself before it asks for trust.</a:t>
-            </a:r>
-          </a:p>
-        </p:txBody>
-      </p:sp>
-      <p:sp>
-        <p:nvSpPr>
-          <p:cNvPr id="22" name="TextBox 21"/>
           <p:cNvSpPr txBox="1"/>
           <p:nvPr/>
         </p:nvSpPr>
@@ -14366,7 +14893,7 @@
       </p:sp>
       <p:sp>
         <p:nvSpPr>
-          <p:cNvPr id="23" name="TextBox 22"/>
+          <p:cNvPr id="20" name="TextBox 19"/>
           <p:cNvSpPr txBox="1"/>
           <p:nvPr/>
         </p:nvSpPr>
@@ -14455,7 +14982,7 @@
                 </a:solidFill>
                 <a:latin typeface="Segoe UI"/>
               </a:rPr>
-              <a:t>ASSUMPTIONS &amp; LIMITS</a:t>
+              <a:t>DELIVERY</a:t>
             </a:r>
           </a:p>
         </p:txBody>
@@ -14494,7 +15021,7 @@
                 </a:solidFill>
                 <a:latin typeface="Segoe UI"/>
               </a:rPr>
-              <a:t>What this does not claim</a:t>
+              <a:t>A phased rollout, value in the first wave</a:t>
             </a:r>
           </a:p>
         </p:txBody>
@@ -14533,7 +15060,7 @@
                 </a:solidFill>
                 <a:latin typeface="Segoe UI"/>
               </a:rPr>
-              <a:t>Stated up front, because a FinOps tool that overstates is worse than none</a:t>
+              <a:t>Sequenced by effort and risk, not by dollar size</a:t>
             </a:r>
           </a:p>
         </p:txBody>
@@ -14584,14 +15111,182 @@
       </p:sp>
       <p:sp>
         <p:nvSpPr>
-          <p:cNvPr id="6" name="TextBox 5"/>
-          <p:cNvSpPr txBox="1"/>
+          <p:cNvPr id="6" name="Rounded Rectangle 5"/>
+          <p:cNvSpPr/>
           <p:nvPr/>
         </p:nvSpPr>
         <p:spPr>
           <a:xfrm>
             <a:off x="640080" y="1965960"/>
-            <a:ext cx="10881360" cy="4023360"/>
+            <a:ext cx="3502152" cy="3749039"/>
+          </a:xfrm>
+          <a:prstGeom prst="roundRect">
+            <a:avLst>
+              <a:gd name="adj" fmla="val 6000"/>
+            </a:avLst>
+          </a:prstGeom>
+          <a:solidFill>
+            <a:srgbClr val="FFFFFF"/>
+          </a:solidFill>
+          <a:ln w="12700">
+            <a:solidFill>
+              <a:srgbClr val="E2E7EF"/>
+            </a:solidFill>
+          </a:ln>
+          <a:effectLst/>
+        </p:spPr>
+        <p:style>
+          <a:lnRef idx="1">
+            <a:schemeClr val="accent1"/>
+          </a:lnRef>
+          <a:fillRef idx="3">
+            <a:schemeClr val="accent1"/>
+          </a:fillRef>
+          <a:effectRef idx="2">
+            <a:schemeClr val="accent1"/>
+          </a:effectRef>
+          <a:fontRef idx="minor">
+            <a:schemeClr val="lt1"/>
+          </a:fontRef>
+        </p:style>
+        <p:txBody>
+          <a:bodyPr rtlCol="0" anchor="ctr"/>
+          <a:lstStyle/>
+          <a:p/>
+        </p:txBody>
+      </p:sp>
+      <p:sp>
+        <p:nvSpPr>
+          <p:cNvPr id="7" name="Rectangle 6"/>
+          <p:cNvSpPr/>
+          <p:nvPr/>
+        </p:nvSpPr>
+        <p:spPr>
+          <a:xfrm>
+            <a:off x="640080" y="1965960"/>
+            <a:ext cx="3502152" cy="50800"/>
+          </a:xfrm>
+          <a:prstGeom prst="rect">
+            <a:avLst/>
+          </a:prstGeom>
+          <a:solidFill>
+            <a:srgbClr val="0C7A3E"/>
+          </a:solidFill>
+          <a:ln>
+            <a:noFill/>
+          </a:ln>
+          <a:effectLst/>
+        </p:spPr>
+        <p:style>
+          <a:lnRef idx="1">
+            <a:schemeClr val="accent1"/>
+          </a:lnRef>
+          <a:fillRef idx="3">
+            <a:schemeClr val="accent1"/>
+          </a:fillRef>
+          <a:effectRef idx="2">
+            <a:schemeClr val="accent1"/>
+          </a:effectRef>
+          <a:fontRef idx="minor">
+            <a:schemeClr val="lt1"/>
+          </a:fontRef>
+        </p:style>
+        <p:txBody>
+          <a:bodyPr rtlCol="0" anchor="ctr"/>
+          <a:lstStyle/>
+          <a:p>
+            <a:pPr algn="ctr"/>
+          </a:p>
+        </p:txBody>
+      </p:sp>
+      <p:sp>
+        <p:nvSpPr>
+          <p:cNvPr id="8" name="TextBox 7"/>
+          <p:cNvSpPr txBox="1"/>
+          <p:nvPr/>
+        </p:nvSpPr>
+        <p:spPr>
+          <a:xfrm>
+            <a:off x="841248" y="2121408"/>
+            <a:ext cx="3108960" cy="320040"/>
+          </a:xfrm>
+          <a:prstGeom prst="rect">
+            <a:avLst/>
+          </a:prstGeom>
+          <a:noFill/>
+        </p:spPr>
+        <p:txBody>
+          <a:bodyPr wrap="square">
+            <a:spAutoFit/>
+          </a:bodyPr>
+          <a:lstStyle/>
+          <a:p>
+            <a:pPr algn="l">
+              <a:spcAft>
+                <a:spcPts val="400"/>
+              </a:spcAft>
+            </a:pPr>
+            <a:r>
+              <a:rPr sz="1150" b="1">
+                <a:solidFill>
+                  <a:srgbClr val="0B142A"/>
+                </a:solidFill>
+                <a:latin typeface="Segoe UI"/>
+              </a:rPr>
+              <a:t>Wave 1 · Weeks 1–4</a:t>
+            </a:r>
+          </a:p>
+        </p:txBody>
+      </p:sp>
+      <p:sp>
+        <p:nvSpPr>
+          <p:cNvPr id="9" name="TextBox 8"/>
+          <p:cNvSpPr txBox="1"/>
+          <p:nvPr/>
+        </p:nvSpPr>
+        <p:spPr>
+          <a:xfrm>
+            <a:off x="841248" y="2432304"/>
+            <a:ext cx="3108960" cy="274320"/>
+          </a:xfrm>
+          <a:prstGeom prst="rect">
+            <a:avLst/>
+          </a:prstGeom>
+          <a:noFill/>
+        </p:spPr>
+        <p:txBody>
+          <a:bodyPr wrap="square">
+            <a:spAutoFit/>
+          </a:bodyPr>
+          <a:lstStyle/>
+          <a:p>
+            <a:pPr algn="l">
+              <a:spcAft>
+                <a:spcPts val="400"/>
+              </a:spcAft>
+            </a:pPr>
+            <a:r>
+              <a:rPr sz="950" b="1">
+                <a:solidFill>
+                  <a:srgbClr val="0C7A3E"/>
+                </a:solidFill>
+                <a:latin typeface="Segoe UI"/>
+              </a:rPr>
+              <a:t>FinOps phase: Inform</a:t>
+            </a:r>
+          </a:p>
+        </p:txBody>
+      </p:sp>
+      <p:sp>
+        <p:nvSpPr>
+          <p:cNvPr id="10" name="TextBox 9"/>
+          <p:cNvSpPr txBox="1"/>
+          <p:nvPr/>
+        </p:nvSpPr>
+        <p:spPr>
+          <a:xfrm>
+            <a:off x="841248" y="2788920"/>
+            <a:ext cx="3108960" cy="2743200"/>
           </a:xfrm>
           <a:prstGeom prst="rect">
             <a:avLst/>
@@ -14610,13 +15305,13 @@
               </a:spcAft>
             </a:pPr>
             <a:r>
-              <a:rPr sz="1200">
+              <a:rPr sz="1050">
                 <a:solidFill>
                   <a:srgbClr val="445066"/>
                 </a:solidFill>
                 <a:latin typeface="Segoe UI"/>
               </a:rPr>
-              <a:t>—  Every figure in this deck comes from a synthetic 24-month utility estate. The dollars are invented; the mechanics are not.</a:t>
+              <a:t>—  Connect payers; validate FOCUS conformance</a:t>
             </a:r>
           </a:p>
           <a:p>
@@ -14626,13 +15321,13 @@
               </a:spcAft>
             </a:pPr>
             <a:r>
-              <a:rPr sz="1200">
+              <a:rPr sz="1050">
                 <a:solidFill>
                   <a:srgbClr val="445066"/>
                 </a:solidFill>
                 <a:latin typeface="Segoe UI"/>
               </a:rPr>
-              <a:t>—  AWS Cost Explorer does not expose list price. On that path ListCost is set equal to BilledCost, so Effective Savings Rate is understated. Use the FOCUS Data Export for the true number.</a:t>
+              <a:t>—  Stand up the executive view and showback</a:t>
             </a:r>
           </a:p>
           <a:p>
@@ -14642,13 +15337,13 @@
               </a:spcAft>
             </a:pPr>
             <a:r>
-              <a:rPr sz="1200">
+              <a:rPr sz="1050">
                 <a:solidFill>
                   <a:srgbClr val="445066"/>
                 </a:solidFill>
                 <a:latin typeface="Segoe UI"/>
               </a:rPr>
-              <a:t>—  Business drivers — customers served, kWh delivered, meter reads — cannot be read from a cloud bill by definition. Unit economics needs a feed from a system of record.</a:t>
+              <a:t>—  Baseline the estate; publish allocation coverage</a:t>
             </a:r>
           </a:p>
           <a:p>
@@ -14658,15 +15353,206 @@
               </a:spcAft>
             </a:pPr>
             <a:r>
-              <a:rPr sz="1200">
+              <a:rPr sz="1050">
                 <a:solidFill>
                   <a:srgbClr val="445066"/>
                 </a:solidFill>
                 <a:latin typeface="Segoe UI"/>
               </a:rPr>
-              <a:t>—  Savings percentages in the lever catalog are vendor 'up-to' figures. Treat them as ceilings.</a:t>
-            </a:r>
-          </a:p>
+              <a:t>—  Quick wins: idle resources, gp2→gp3, orphaned snapshots</a:t>
+            </a:r>
+          </a:p>
+        </p:txBody>
+      </p:sp>
+      <p:sp>
+        <p:nvSpPr>
+          <p:cNvPr id="11" name="Rounded Rectangle 10"/>
+          <p:cNvSpPr/>
+          <p:nvPr/>
+        </p:nvSpPr>
+        <p:spPr>
+          <a:xfrm>
+            <a:off x="4315967" y="1965960"/>
+            <a:ext cx="3502152" cy="3749039"/>
+          </a:xfrm>
+          <a:prstGeom prst="roundRect">
+            <a:avLst>
+              <a:gd name="adj" fmla="val 6000"/>
+            </a:avLst>
+          </a:prstGeom>
+          <a:solidFill>
+            <a:srgbClr val="FFFFFF"/>
+          </a:solidFill>
+          <a:ln w="12700">
+            <a:solidFill>
+              <a:srgbClr val="E2E7EF"/>
+            </a:solidFill>
+          </a:ln>
+          <a:effectLst/>
+        </p:spPr>
+        <p:style>
+          <a:lnRef idx="1">
+            <a:schemeClr val="accent1"/>
+          </a:lnRef>
+          <a:fillRef idx="3">
+            <a:schemeClr val="accent1"/>
+          </a:fillRef>
+          <a:effectRef idx="2">
+            <a:schemeClr val="accent1"/>
+          </a:effectRef>
+          <a:fontRef idx="minor">
+            <a:schemeClr val="lt1"/>
+          </a:fontRef>
+        </p:style>
+        <p:txBody>
+          <a:bodyPr rtlCol="0" anchor="ctr"/>
+          <a:lstStyle/>
+          <a:p/>
+        </p:txBody>
+      </p:sp>
+      <p:sp>
+        <p:nvSpPr>
+          <p:cNvPr id="12" name="Rectangle 11"/>
+          <p:cNvSpPr/>
+          <p:nvPr/>
+        </p:nvSpPr>
+        <p:spPr>
+          <a:xfrm>
+            <a:off x="4315967" y="1965960"/>
+            <a:ext cx="3502152" cy="50800"/>
+          </a:xfrm>
+          <a:prstGeom prst="rect">
+            <a:avLst/>
+          </a:prstGeom>
+          <a:solidFill>
+            <a:srgbClr val="1E6FD9"/>
+          </a:solidFill>
+          <a:ln>
+            <a:noFill/>
+          </a:ln>
+          <a:effectLst/>
+        </p:spPr>
+        <p:style>
+          <a:lnRef idx="1">
+            <a:schemeClr val="accent1"/>
+          </a:lnRef>
+          <a:fillRef idx="3">
+            <a:schemeClr val="accent1"/>
+          </a:fillRef>
+          <a:effectRef idx="2">
+            <a:schemeClr val="accent1"/>
+          </a:effectRef>
+          <a:fontRef idx="minor">
+            <a:schemeClr val="lt1"/>
+          </a:fontRef>
+        </p:style>
+        <p:txBody>
+          <a:bodyPr rtlCol="0" anchor="ctr"/>
+          <a:lstStyle/>
+          <a:p>
+            <a:pPr algn="ctr"/>
+          </a:p>
+        </p:txBody>
+      </p:sp>
+      <p:sp>
+        <p:nvSpPr>
+          <p:cNvPr id="13" name="TextBox 12"/>
+          <p:cNvSpPr txBox="1"/>
+          <p:nvPr/>
+        </p:nvSpPr>
+        <p:spPr>
+          <a:xfrm>
+            <a:off x="4517135" y="2121408"/>
+            <a:ext cx="3108960" cy="320040"/>
+          </a:xfrm>
+          <a:prstGeom prst="rect">
+            <a:avLst/>
+          </a:prstGeom>
+          <a:noFill/>
+        </p:spPr>
+        <p:txBody>
+          <a:bodyPr wrap="square">
+            <a:spAutoFit/>
+          </a:bodyPr>
+          <a:lstStyle/>
+          <a:p>
+            <a:pPr algn="l">
+              <a:spcAft>
+                <a:spcPts val="400"/>
+              </a:spcAft>
+            </a:pPr>
+            <a:r>
+              <a:rPr sz="1150" b="1">
+                <a:solidFill>
+                  <a:srgbClr val="0B142A"/>
+                </a:solidFill>
+                <a:latin typeface="Segoe UI"/>
+              </a:rPr>
+              <a:t>Wave 2 · Weeks 5–12</a:t>
+            </a:r>
+          </a:p>
+        </p:txBody>
+      </p:sp>
+      <p:sp>
+        <p:nvSpPr>
+          <p:cNvPr id="14" name="TextBox 13"/>
+          <p:cNvSpPr txBox="1"/>
+          <p:nvPr/>
+        </p:nvSpPr>
+        <p:spPr>
+          <a:xfrm>
+            <a:off x="4517135" y="2432304"/>
+            <a:ext cx="3108960" cy="274320"/>
+          </a:xfrm>
+          <a:prstGeom prst="rect">
+            <a:avLst/>
+          </a:prstGeom>
+          <a:noFill/>
+        </p:spPr>
+        <p:txBody>
+          <a:bodyPr wrap="square">
+            <a:spAutoFit/>
+          </a:bodyPr>
+          <a:lstStyle/>
+          <a:p>
+            <a:pPr algn="l">
+              <a:spcAft>
+                <a:spcPts val="400"/>
+              </a:spcAft>
+            </a:pPr>
+            <a:r>
+              <a:rPr sz="950" b="1">
+                <a:solidFill>
+                  <a:srgbClr val="1E6FD9"/>
+                </a:solidFill>
+                <a:latin typeface="Segoe UI"/>
+              </a:rPr>
+              <a:t>FinOps phase: Optimize</a:t>
+            </a:r>
+          </a:p>
+        </p:txBody>
+      </p:sp>
+      <p:sp>
+        <p:nvSpPr>
+          <p:cNvPr id="15" name="TextBox 14"/>
+          <p:cNvSpPr txBox="1"/>
+          <p:nvPr/>
+        </p:nvSpPr>
+        <p:spPr>
+          <a:xfrm>
+            <a:off x="4517135" y="2788920"/>
+            <a:ext cx="3108960" cy="2743200"/>
+          </a:xfrm>
+          <a:prstGeom prst="rect">
+            <a:avLst/>
+          </a:prstGeom>
+          <a:noFill/>
+        </p:spPr>
+        <p:txBody>
+          <a:bodyPr wrap="square">
+            <a:spAutoFit/>
+          </a:bodyPr>
+          <a:lstStyle/>
           <a:p>
             <a:pPr>
               <a:spcAft>
@@ -14674,13 +15560,13 @@
               </a:spcAft>
             </a:pPr>
             <a:r>
-              <a:rPr sz="1200">
+              <a:rPr sz="1050">
                 <a:solidFill>
                   <a:srgbClr val="445066"/>
                 </a:solidFill>
                 <a:latin typeface="Segoe UI"/>
               </a:rPr>
-              <a:t>—  Storage-tiering and rightsizing detectors infer from billing data alone. Where a detector cannot see access patterns or CPU utilisation, it lowers its confidence and says what telemetry would confirm it.</a:t>
+              <a:t>—  Tagging remediation to cross the chargeback line</a:t>
             </a:r>
           </a:p>
           <a:p>
@@ -14690,13 +15576,13 @@
               </a:spcAft>
             </a:pPr>
             <a:r>
-              <a:rPr sz="1200">
+              <a:rPr sz="1050">
                 <a:solidFill>
                   <a:srgbClr val="445066"/>
                 </a:solidFill>
                 <a:latin typeface="Segoe UI"/>
               </a:rPr>
-              <a:t>—  Several vendor endpoints are marked UNVERIFIED in code where public documentation was thin — notably ServiceNow's Cloud Cost Management table names, which must be enumerated in Con Edison's own instance.</a:t>
+              <a:t>—  Commitment strategy: coverage to the sustained floor</a:t>
             </a:r>
           </a:p>
           <a:p>
@@ -14706,20 +15592,330 @@
               </a:spcAft>
             </a:pPr>
             <a:r>
-              <a:rPr sz="1200">
+              <a:rPr sz="1050">
                 <a:solidFill>
                   <a:srgbClr val="445066"/>
                 </a:solidFill>
                 <a:latin typeface="Segoe UI"/>
               </a:rPr>
-              <a:t>—  The ~90% allocation-coverage chargeback threshold is practitioner consensus, not a published FinOps Foundation number.</a:t>
-            </a:r>
-          </a:p>
-        </p:txBody>
-      </p:sp>
-      <p:sp>
-        <p:nvSpPr>
-          <p:cNvPr id="7" name="TextBox 6"/>
+              <a:t>—  Non-prod scheduling; previous-generation migration</a:t>
+            </a:r>
+          </a:p>
+          <a:p>
+            <a:pPr>
+              <a:spcAft>
+                <a:spcPts val="900"/>
+              </a:spcAft>
+            </a:pPr>
+            <a:r>
+              <a:rPr sz="1050">
+                <a:solidFill>
+                  <a:srgbClr val="445066"/>
+                </a:solidFill>
+                <a:latin typeface="Segoe UI"/>
+              </a:rPr>
+              <a:t>—  Forecast vs budget in the monthly finance cycle</a:t>
+            </a:r>
+          </a:p>
+        </p:txBody>
+      </p:sp>
+      <p:sp>
+        <p:nvSpPr>
+          <p:cNvPr id="16" name="Rounded Rectangle 15"/>
+          <p:cNvSpPr/>
+          <p:nvPr/>
+        </p:nvSpPr>
+        <p:spPr>
+          <a:xfrm>
+            <a:off x="7991854" y="1965960"/>
+            <a:ext cx="3502152" cy="3749039"/>
+          </a:xfrm>
+          <a:prstGeom prst="roundRect">
+            <a:avLst>
+              <a:gd name="adj" fmla="val 6000"/>
+            </a:avLst>
+          </a:prstGeom>
+          <a:solidFill>
+            <a:srgbClr val="FFFFFF"/>
+          </a:solidFill>
+          <a:ln w="12700">
+            <a:solidFill>
+              <a:srgbClr val="E2E7EF"/>
+            </a:solidFill>
+          </a:ln>
+          <a:effectLst/>
+        </p:spPr>
+        <p:style>
+          <a:lnRef idx="1">
+            <a:schemeClr val="accent1"/>
+          </a:lnRef>
+          <a:fillRef idx="3">
+            <a:schemeClr val="accent1"/>
+          </a:fillRef>
+          <a:effectRef idx="2">
+            <a:schemeClr val="accent1"/>
+          </a:effectRef>
+          <a:fontRef idx="minor">
+            <a:schemeClr val="lt1"/>
+          </a:fontRef>
+        </p:style>
+        <p:txBody>
+          <a:bodyPr rtlCol="0" anchor="ctr"/>
+          <a:lstStyle/>
+          <a:p/>
+        </p:txBody>
+      </p:sp>
+      <p:sp>
+        <p:nvSpPr>
+          <p:cNvPr id="17" name="Rectangle 16"/>
+          <p:cNvSpPr/>
+          <p:nvPr/>
+        </p:nvSpPr>
+        <p:spPr>
+          <a:xfrm>
+            <a:off x="7991854" y="1965960"/>
+            <a:ext cx="3502152" cy="50800"/>
+          </a:xfrm>
+          <a:prstGeom prst="rect">
+            <a:avLst/>
+          </a:prstGeom>
+          <a:solidFill>
+            <a:srgbClr val="5B4BC4"/>
+          </a:solidFill>
+          <a:ln>
+            <a:noFill/>
+          </a:ln>
+          <a:effectLst/>
+        </p:spPr>
+        <p:style>
+          <a:lnRef idx="1">
+            <a:schemeClr val="accent1"/>
+          </a:lnRef>
+          <a:fillRef idx="3">
+            <a:schemeClr val="accent1"/>
+          </a:fillRef>
+          <a:effectRef idx="2">
+            <a:schemeClr val="accent1"/>
+          </a:effectRef>
+          <a:fontRef idx="minor">
+            <a:schemeClr val="lt1"/>
+          </a:fontRef>
+        </p:style>
+        <p:txBody>
+          <a:bodyPr rtlCol="0" anchor="ctr"/>
+          <a:lstStyle/>
+          <a:p>
+            <a:pPr algn="ctr"/>
+          </a:p>
+        </p:txBody>
+      </p:sp>
+      <p:sp>
+        <p:nvSpPr>
+          <p:cNvPr id="18" name="TextBox 17"/>
+          <p:cNvSpPr txBox="1"/>
+          <p:nvPr/>
+        </p:nvSpPr>
+        <p:spPr>
+          <a:xfrm>
+            <a:off x="8193022" y="2121408"/>
+            <a:ext cx="3108960" cy="320040"/>
+          </a:xfrm>
+          <a:prstGeom prst="rect">
+            <a:avLst/>
+          </a:prstGeom>
+          <a:noFill/>
+        </p:spPr>
+        <p:txBody>
+          <a:bodyPr wrap="square">
+            <a:spAutoFit/>
+          </a:bodyPr>
+          <a:lstStyle/>
+          <a:p>
+            <a:pPr algn="l">
+              <a:spcAft>
+                <a:spcPts val="400"/>
+              </a:spcAft>
+            </a:pPr>
+            <a:r>
+              <a:rPr sz="1150" b="1">
+                <a:solidFill>
+                  <a:srgbClr val="0B142A"/>
+                </a:solidFill>
+                <a:latin typeface="Segoe UI"/>
+              </a:rPr>
+              <a:t>Wave 3 · Quarter 2+</a:t>
+            </a:r>
+          </a:p>
+        </p:txBody>
+      </p:sp>
+      <p:sp>
+        <p:nvSpPr>
+          <p:cNvPr id="19" name="TextBox 18"/>
+          <p:cNvSpPr txBox="1"/>
+          <p:nvPr/>
+        </p:nvSpPr>
+        <p:spPr>
+          <a:xfrm>
+            <a:off x="8193022" y="2432304"/>
+            <a:ext cx="3108960" cy="274320"/>
+          </a:xfrm>
+          <a:prstGeom prst="rect">
+            <a:avLst/>
+          </a:prstGeom>
+          <a:noFill/>
+        </p:spPr>
+        <p:txBody>
+          <a:bodyPr wrap="square">
+            <a:spAutoFit/>
+          </a:bodyPr>
+          <a:lstStyle/>
+          <a:p>
+            <a:pPr algn="l">
+              <a:spcAft>
+                <a:spcPts val="400"/>
+              </a:spcAft>
+            </a:pPr>
+            <a:r>
+              <a:rPr sz="950" b="1">
+                <a:solidFill>
+                  <a:srgbClr val="5B4BC4"/>
+                </a:solidFill>
+                <a:latin typeface="Segoe UI"/>
+              </a:rPr>
+              <a:t>FinOps phase: Operate</a:t>
+            </a:r>
+          </a:p>
+        </p:txBody>
+      </p:sp>
+      <p:sp>
+        <p:nvSpPr>
+          <p:cNvPr id="20" name="TextBox 19"/>
+          <p:cNvSpPr txBox="1"/>
+          <p:nvPr/>
+        </p:nvSpPr>
+        <p:spPr>
+          <a:xfrm>
+            <a:off x="8193022" y="2788920"/>
+            <a:ext cx="3108960" cy="2743200"/>
+          </a:xfrm>
+          <a:prstGeom prst="rect">
+            <a:avLst/>
+          </a:prstGeom>
+          <a:noFill/>
+        </p:spPr>
+        <p:txBody>
+          <a:bodyPr wrap="square">
+            <a:spAutoFit/>
+          </a:bodyPr>
+          <a:lstStyle/>
+          <a:p>
+            <a:pPr>
+              <a:spcAft>
+                <a:spcPts val="900"/>
+              </a:spcAft>
+            </a:pPr>
+            <a:r>
+              <a:rPr sz="1050">
+                <a:solidFill>
+                  <a:srgbClr val="445066"/>
+                </a:solidFill>
+                <a:latin typeface="Segoe UI"/>
+              </a:rPr>
+              <a:t>—  Chargeback with the agreed shared-cost policy</a:t>
+            </a:r>
+          </a:p>
+          <a:p>
+            <a:pPr>
+              <a:spcAft>
+                <a:spcPts val="900"/>
+              </a:spcAft>
+            </a:pPr>
+            <a:r>
+              <a:rPr sz="1050">
+                <a:solidFill>
+                  <a:srgbClr val="445066"/>
+                </a:solidFill>
+                <a:latin typeface="Segoe UI"/>
+              </a:rPr>
+              <a:t>—  Unit economics per customer, per kWh, per meter read</a:t>
+            </a:r>
+          </a:p>
+          <a:p>
+            <a:pPr>
+              <a:spcAft>
+                <a:spcPts val="900"/>
+              </a:spcAft>
+            </a:pPr>
+            <a:r>
+              <a:rPr sz="1050">
+                <a:solidFill>
+                  <a:srgbClr val="445066"/>
+                </a:solidFill>
+                <a:latin typeface="Segoe UI"/>
+              </a:rPr>
+              <a:t>—  Anomaly alerting into ServiceNow</a:t>
+            </a:r>
+          </a:p>
+          <a:p>
+            <a:pPr>
+              <a:spcAft>
+                <a:spcPts val="900"/>
+              </a:spcAft>
+            </a:pPr>
+            <a:r>
+              <a:rPr sz="1050">
+                <a:solidFill>
+                  <a:srgbClr val="445066"/>
+                </a:solidFill>
+                <a:latin typeface="Segoe UI"/>
+              </a:rPr>
+              <a:t>—  AI Copilot for self-service, FinOps for AI/GPU spend</a:t>
+            </a:r>
+          </a:p>
+        </p:txBody>
+      </p:sp>
+      <p:sp>
+        <p:nvSpPr>
+          <p:cNvPr id="21" name="TextBox 20"/>
+          <p:cNvSpPr txBox="1"/>
+          <p:nvPr/>
+        </p:nvSpPr>
+        <p:spPr>
+          <a:xfrm>
+            <a:off x="640080" y="5897880"/>
+            <a:ext cx="10881360" cy="365760"/>
+          </a:xfrm>
+          <a:prstGeom prst="rect">
+            <a:avLst/>
+          </a:prstGeom>
+          <a:noFill/>
+        </p:spPr>
+        <p:txBody>
+          <a:bodyPr wrap="square">
+            <a:spAutoFit/>
+          </a:bodyPr>
+          <a:lstStyle/>
+          <a:p>
+            <a:pPr algn="l">
+              <a:spcAft>
+                <a:spcPts val="400"/>
+              </a:spcAft>
+            </a:pPr>
+            <a:r>
+              <a:rPr sz="1100" b="1">
+                <a:solidFill>
+                  <a:srgbClr val="0B142A"/>
+                </a:solidFill>
+                <a:latin typeface="Segoe UI"/>
+              </a:rPr>
+              <a:t>Wave 1 is deliberately all low-effort, low-risk levers — the programme should pay for itself before it asks for trust.</a:t>
+            </a:r>
+          </a:p>
+        </p:txBody>
+      </p:sp>
+      <p:sp>
+        <p:nvSpPr>
+          <p:cNvPr id="22" name="TextBox 21"/>
           <p:cNvSpPr txBox="1"/>
           <p:nvPr/>
         </p:nvSpPr>
@@ -14749,7 +15945,7 @@
       </p:sp>
       <p:sp>
         <p:nvSpPr>
-          <p:cNvPr id="8" name="TextBox 7"/>
+          <p:cNvPr id="23" name="TextBox 22"/>
           <p:cNvSpPr txBox="1"/>
           <p:nvPr/>
         </p:nvSpPr>
@@ -15674,6 +16870,389 @@
       <p:grpSpPr/>
       <p:sp>
         <p:nvSpPr>
+          <p:cNvPr id="2" name="TextBox 1"/>
+          <p:cNvSpPr txBox="1"/>
+          <p:nvPr/>
+        </p:nvSpPr>
+        <p:spPr>
+          <a:xfrm>
+            <a:off x="640080" y="384048"/>
+            <a:ext cx="10058400" cy="274320"/>
+          </a:xfrm>
+          <a:prstGeom prst="rect">
+            <a:avLst/>
+          </a:prstGeom>
+          <a:noFill/>
+        </p:spPr>
+        <p:txBody>
+          <a:bodyPr wrap="square">
+            <a:spAutoFit/>
+          </a:bodyPr>
+          <a:lstStyle/>
+          <a:p>
+            <a:pPr algn="l">
+              <a:spcAft>
+                <a:spcPts val="400"/>
+              </a:spcAft>
+            </a:pPr>
+            <a:r>
+              <a:rPr sz="1000" b="1">
+                <a:solidFill>
+                  <a:srgbClr val="7A8599"/>
+                </a:solidFill>
+                <a:latin typeface="Segoe UI"/>
+              </a:rPr>
+              <a:t>ASSUMPTIONS &amp; LIMITS</a:t>
+            </a:r>
+          </a:p>
+        </p:txBody>
+      </p:sp>
+      <p:sp>
+        <p:nvSpPr>
+          <p:cNvPr id="3" name="TextBox 2"/>
+          <p:cNvSpPr txBox="1"/>
+          <p:nvPr/>
+        </p:nvSpPr>
+        <p:spPr>
+          <a:xfrm>
+            <a:off x="640080" y="640080"/>
+            <a:ext cx="10881360" cy="548640"/>
+          </a:xfrm>
+          <a:prstGeom prst="rect">
+            <a:avLst/>
+          </a:prstGeom>
+          <a:noFill/>
+        </p:spPr>
+        <p:txBody>
+          <a:bodyPr wrap="square">
+            <a:spAutoFit/>
+          </a:bodyPr>
+          <a:lstStyle/>
+          <a:p>
+            <a:pPr algn="l">
+              <a:spcAft>
+                <a:spcPts val="400"/>
+              </a:spcAft>
+            </a:pPr>
+            <a:r>
+              <a:rPr sz="2800" b="1">
+                <a:solidFill>
+                  <a:srgbClr val="0B142A"/>
+                </a:solidFill>
+                <a:latin typeface="Segoe UI"/>
+              </a:rPr>
+              <a:t>What this does not claim</a:t>
+            </a:r>
+          </a:p>
+        </p:txBody>
+      </p:sp>
+      <p:sp>
+        <p:nvSpPr>
+          <p:cNvPr id="4" name="TextBox 3"/>
+          <p:cNvSpPr txBox="1"/>
+          <p:nvPr/>
+        </p:nvSpPr>
+        <p:spPr>
+          <a:xfrm>
+            <a:off x="640080" y="1207008"/>
+            <a:ext cx="10881360" cy="365760"/>
+          </a:xfrm>
+          <a:prstGeom prst="rect">
+            <a:avLst/>
+          </a:prstGeom>
+          <a:noFill/>
+        </p:spPr>
+        <p:txBody>
+          <a:bodyPr wrap="square">
+            <a:spAutoFit/>
+          </a:bodyPr>
+          <a:lstStyle/>
+          <a:p>
+            <a:pPr algn="l">
+              <a:spcAft>
+                <a:spcPts val="400"/>
+              </a:spcAft>
+            </a:pPr>
+            <a:r>
+              <a:rPr sz="1250" b="0">
+                <a:solidFill>
+                  <a:srgbClr val="7A8599"/>
+                </a:solidFill>
+                <a:latin typeface="Segoe UI"/>
+              </a:rPr>
+              <a:t>Stated up front, because a FinOps tool that overstates is worse than none</a:t>
+            </a:r>
+          </a:p>
+        </p:txBody>
+      </p:sp>
+      <p:sp>
+        <p:nvSpPr>
+          <p:cNvPr id="5" name="Rectangle 4"/>
+          <p:cNvSpPr/>
+          <p:nvPr/>
+        </p:nvSpPr>
+        <p:spPr>
+          <a:xfrm>
+            <a:off x="640080" y="1664208"/>
+            <a:ext cx="1280160" cy="38100"/>
+          </a:xfrm>
+          <a:prstGeom prst="rect">
+            <a:avLst/>
+          </a:prstGeom>
+          <a:solidFill>
+            <a:srgbClr val="1E6FD9"/>
+          </a:solidFill>
+          <a:ln>
+            <a:noFill/>
+          </a:ln>
+          <a:effectLst/>
+        </p:spPr>
+        <p:style>
+          <a:lnRef idx="1">
+            <a:schemeClr val="accent1"/>
+          </a:lnRef>
+          <a:fillRef idx="3">
+            <a:schemeClr val="accent1"/>
+          </a:fillRef>
+          <a:effectRef idx="2">
+            <a:schemeClr val="accent1"/>
+          </a:effectRef>
+          <a:fontRef idx="minor">
+            <a:schemeClr val="lt1"/>
+          </a:fontRef>
+        </p:style>
+        <p:txBody>
+          <a:bodyPr rtlCol="0" anchor="ctr"/>
+          <a:lstStyle/>
+          <a:p>
+            <a:pPr algn="ctr"/>
+          </a:p>
+        </p:txBody>
+      </p:sp>
+      <p:sp>
+        <p:nvSpPr>
+          <p:cNvPr id="6" name="TextBox 5"/>
+          <p:cNvSpPr txBox="1"/>
+          <p:nvPr/>
+        </p:nvSpPr>
+        <p:spPr>
+          <a:xfrm>
+            <a:off x="640080" y="1965960"/>
+            <a:ext cx="10881360" cy="4023360"/>
+          </a:xfrm>
+          <a:prstGeom prst="rect">
+            <a:avLst/>
+          </a:prstGeom>
+          <a:noFill/>
+        </p:spPr>
+        <p:txBody>
+          <a:bodyPr wrap="square">
+            <a:spAutoFit/>
+          </a:bodyPr>
+          <a:lstStyle/>
+          <a:p>
+            <a:pPr>
+              <a:spcAft>
+                <a:spcPts val="900"/>
+              </a:spcAft>
+            </a:pPr>
+            <a:r>
+              <a:rPr sz="1200">
+                <a:solidFill>
+                  <a:srgbClr val="445066"/>
+                </a:solidFill>
+                <a:latin typeface="Segoe UI"/>
+              </a:rPr>
+              <a:t>—  Every figure in this deck comes from a synthetic 24-month utility estate. The dollars are invented; the mechanics are not.</a:t>
+            </a:r>
+          </a:p>
+          <a:p>
+            <a:pPr>
+              <a:spcAft>
+                <a:spcPts val="900"/>
+              </a:spcAft>
+            </a:pPr>
+            <a:r>
+              <a:rPr sz="1200">
+                <a:solidFill>
+                  <a:srgbClr val="445066"/>
+                </a:solidFill>
+                <a:latin typeface="Segoe UI"/>
+              </a:rPr>
+              <a:t>—  AWS Cost Explorer does not expose list price. On that path ListCost is set equal to BilledCost, so Effective Savings Rate is understated. Use the FOCUS Data Export for the true number.</a:t>
+            </a:r>
+          </a:p>
+          <a:p>
+            <a:pPr>
+              <a:spcAft>
+                <a:spcPts val="900"/>
+              </a:spcAft>
+            </a:pPr>
+            <a:r>
+              <a:rPr sz="1200">
+                <a:solidFill>
+                  <a:srgbClr val="445066"/>
+                </a:solidFill>
+                <a:latin typeface="Segoe UI"/>
+              </a:rPr>
+              <a:t>—  Business drivers — customers served, kWh delivered, meter reads — cannot be read from a cloud bill by definition. Unit economics needs a feed from a system of record.</a:t>
+            </a:r>
+          </a:p>
+          <a:p>
+            <a:pPr>
+              <a:spcAft>
+                <a:spcPts val="900"/>
+              </a:spcAft>
+            </a:pPr>
+            <a:r>
+              <a:rPr sz="1200">
+                <a:solidFill>
+                  <a:srgbClr val="445066"/>
+                </a:solidFill>
+                <a:latin typeface="Segoe UI"/>
+              </a:rPr>
+              <a:t>—  Savings percentages in the lever catalog are vendor 'up-to' figures. Treat them as ceilings.</a:t>
+            </a:r>
+          </a:p>
+          <a:p>
+            <a:pPr>
+              <a:spcAft>
+                <a:spcPts val="900"/>
+              </a:spcAft>
+            </a:pPr>
+            <a:r>
+              <a:rPr sz="1200">
+                <a:solidFill>
+                  <a:srgbClr val="445066"/>
+                </a:solidFill>
+                <a:latin typeface="Segoe UI"/>
+              </a:rPr>
+              <a:t>—  Storage-tiering and rightsizing detectors infer from billing data alone. Where a detector cannot see access patterns or CPU utilisation, it lowers its confidence and says what telemetry would confirm it.</a:t>
+            </a:r>
+          </a:p>
+          <a:p>
+            <a:pPr>
+              <a:spcAft>
+                <a:spcPts val="900"/>
+              </a:spcAft>
+            </a:pPr>
+            <a:r>
+              <a:rPr sz="1200">
+                <a:solidFill>
+                  <a:srgbClr val="445066"/>
+                </a:solidFill>
+                <a:latin typeface="Segoe UI"/>
+              </a:rPr>
+              <a:t>—  Several vendor endpoints are marked UNVERIFIED in code where public documentation was thin — notably ServiceNow's Cloud Cost Management table names, which must be enumerated in Con Edison's own instance.</a:t>
+            </a:r>
+          </a:p>
+          <a:p>
+            <a:pPr>
+              <a:spcAft>
+                <a:spcPts val="900"/>
+              </a:spcAft>
+            </a:pPr>
+            <a:r>
+              <a:rPr sz="1200">
+                <a:solidFill>
+                  <a:srgbClr val="445066"/>
+                </a:solidFill>
+                <a:latin typeface="Segoe UI"/>
+              </a:rPr>
+              <a:t>—  The ~90% allocation-coverage chargeback threshold is practitioner consensus, not a published FinOps Foundation number.</a:t>
+            </a:r>
+          </a:p>
+        </p:txBody>
+      </p:sp>
+      <p:sp>
+        <p:nvSpPr>
+          <p:cNvPr id="7" name="TextBox 6"/>
+          <p:cNvSpPr txBox="1"/>
+          <p:nvPr/>
+        </p:nvSpPr>
+        <p:spPr>
+          <a:xfrm>
+            <a:off x="640080" y="6355080"/>
+            <a:ext cx="8229600" cy="274320"/>
+          </a:xfrm>
+          <a:prstGeom prst="rect">
+            <a:avLst/>
+          </a:prstGeom>
+          <a:noFill/>
+        </p:spPr>
+        <p:txBody>
+          <a:bodyPr wrap="square">
+            <a:spAutoFit/>
+          </a:bodyPr>
+          <a:lstStyle/>
+          <a:p>
+            <a:pPr algn="l">
+              <a:spcAft>
+                <a:spcPts val="400"/>
+              </a:spcAft>
+            </a:pPr>
+          </a:p>
+        </p:txBody>
+      </p:sp>
+      <p:sp>
+        <p:nvSpPr>
+          <p:cNvPr id="8" name="TextBox 7"/>
+          <p:cNvSpPr txBox="1"/>
+          <p:nvPr/>
+        </p:nvSpPr>
+        <p:spPr>
+          <a:xfrm>
+            <a:off x="10424160" y="6355080"/>
+            <a:ext cx="1188720" cy="274320"/>
+          </a:xfrm>
+          <a:prstGeom prst="rect">
+            <a:avLst/>
+          </a:prstGeom>
+          <a:noFill/>
+        </p:spPr>
+        <p:txBody>
+          <a:bodyPr wrap="square">
+            <a:spAutoFit/>
+          </a:bodyPr>
+          <a:lstStyle/>
+          <a:p>
+            <a:pPr algn="r">
+              <a:spcAft>
+                <a:spcPts val="400"/>
+              </a:spcAft>
+            </a:pPr>
+            <a:r>
+              <a:rPr sz="850" b="1">
+                <a:solidFill>
+                  <a:srgbClr val="7A8599"/>
+                </a:solidFill>
+                <a:latin typeface="Segoe UI"/>
+              </a:rPr>
+              <a:t>Infosys</a:t>
+            </a:r>
+          </a:p>
+        </p:txBody>
+      </p:sp>
+    </p:spTree>
+  </p:cSld>
+  <p:clrMapOvr>
+    <a:masterClrMapping/>
+  </p:clrMapOvr>
+</p:sld>
+</file>
+
+<file path=ppt/slides/slide21.xml><?xml version="1.0" encoding="utf-8"?>
+<p:sld xmlns:a="http://schemas.openxmlformats.org/drawingml/2006/main" xmlns:p="http://schemas.openxmlformats.org/presentationml/2006/main" xmlns:r="http://schemas.openxmlformats.org/officeDocument/2006/relationships">
+  <p:cSld>
+    <p:spTree>
+      <p:nvGrpSpPr>
+        <p:cNvPr id="1" name=""/>
+        <p:cNvGrpSpPr/>
+        <p:nvPr/>
+      </p:nvGrpSpPr>
+      <p:grpSpPr/>
+      <p:sp>
+        <p:nvSpPr>
           <p:cNvPr id="2" name="Rounded Rectangle 1"/>
           <p:cNvSpPr/>
           <p:nvPr/>
@@ -16192,6 +17771,84 @@
         </p:nvSpPr>
         <p:spPr>
           <a:xfrm>
+            <a:off x="822960" y="6172200"/>
+            <a:ext cx="3200400" cy="365760"/>
+          </a:xfrm>
+          <a:prstGeom prst="rect">
+            <a:avLst/>
+          </a:prstGeom>
+          <a:noFill/>
+        </p:spPr>
+        <p:txBody>
+          <a:bodyPr wrap="square">
+            <a:spAutoFit/>
+          </a:bodyPr>
+          <a:lstStyle/>
+          <a:p>
+            <a:pPr algn="l">
+              <a:spcAft>
+                <a:spcPts val="400"/>
+              </a:spcAft>
+            </a:pPr>
+            <a:r>
+              <a:rPr sz="1350" b="1">
+                <a:solidFill>
+                  <a:srgbClr val="0B142A"/>
+                </a:solidFill>
+                <a:latin typeface="Segoe UI"/>
+              </a:rPr>
+              <a:t>A GCP project</a:t>
+            </a:r>
+          </a:p>
+        </p:txBody>
+      </p:sp>
+      <p:sp>
+        <p:nvSpPr>
+          <p:cNvPr id="16" name="TextBox 15"/>
+          <p:cNvSpPr txBox="1"/>
+          <p:nvPr/>
+        </p:nvSpPr>
+        <p:spPr>
+          <a:xfrm>
+            <a:off x="4206240" y="6153912"/>
+            <a:ext cx="7223760" cy="566928"/>
+          </a:xfrm>
+          <a:prstGeom prst="rect">
+            <a:avLst/>
+          </a:prstGeom>
+          <a:noFill/>
+        </p:spPr>
+        <p:txBody>
+          <a:bodyPr wrap="square">
+            <a:spAutoFit/>
+          </a:bodyPr>
+          <a:lstStyle/>
+          <a:p>
+            <a:pPr algn="l">
+              <a:spcAft>
+                <a:spcPts val="400"/>
+              </a:spcAft>
+            </a:pPr>
+            <a:r>
+              <a:rPr sz="1150" b="0">
+                <a:solidFill>
+                  <a:srgbClr val="445066"/>
+                </a:solidFill>
+                <a:latin typeface="Segoe UI"/>
+              </a:rPr>
+              <a:t>Plus a billing account and an identity provider for IAP. Vertex authenticates the agents through the service account, so no model API key is ever created.</a:t>
+            </a:r>
+          </a:p>
+        </p:txBody>
+      </p:sp>
+      <p:sp>
+        <p:nvSpPr>
+          <p:cNvPr id="17" name="TextBox 16"/>
+          <p:cNvSpPr txBox="1"/>
+          <p:nvPr/>
+        </p:nvSpPr>
+        <p:spPr>
+          <a:xfrm>
             <a:off x="640080" y="6355080"/>
             <a:ext cx="8229600" cy="274320"/>
           </a:xfrm>
@@ -16225,7 +17882,7 @@
       </p:sp>
       <p:sp>
         <p:nvSpPr>
-          <p:cNvPr id="16" name="TextBox 15"/>
+          <p:cNvPr id="18" name="TextBox 17"/>
           <p:cNvSpPr txBox="1"/>
           <p:nvPr/>
         </p:nvSpPr>

--- a/Infosys_FinOps_ConEdison.pptx
+++ b/Infosys_FinOps_ConEdison.pptx
@@ -162,9 +162,9 @@
           </c:spPr>
           <c:cat>
             <c:strRef>
-              <c:f>Sheet1!$A$2:$A$4</c:f>
+              <c:f>Sheet1!$A$2:$A$5</c:f>
               <c:strCache>
-                <c:ptCount val="3"/>
+                <c:ptCount val="4"/>
                 <c:pt idx="0">
                   <c:v>AWS</c:v>
                 </c:pt>
@@ -174,23 +174,29 @@
                 <c:pt idx="2">
                   <c:v>GCP</c:v>
                 </c:pt>
+                <c:pt idx="3">
+                  <c:v>OCI</c:v>
+                </c:pt>
               </c:strCache>
             </c:strRef>
           </c:cat>
           <c:val>
             <c:numRef>
-              <c:f>Sheet1!$B$2:$B$4</c:f>
+              <c:f>Sheet1!$B$2:$B$5</c:f>
               <c:numCache>
                 <c:formatCode>General</c:formatCode>
-                <c:ptCount val="3"/>
+                <c:ptCount val="4"/>
                 <c:pt idx="0">
-                  <c:v>16878792.00068</c:v>
+                  <c:v>15712148.35108</c:v>
                 </c:pt>
                 <c:pt idx="1">
-                  <c:v>8225651.24992</c:v>
+                  <c:v>7761360.19392</c:v>
                 </c:pt>
                 <c:pt idx="2">
-                  <c:v>5179213.32652</c:v>
+                  <c:v>4671985.05634</c:v>
+                </c:pt>
+                <c:pt idx="3">
+                  <c:v>4501132.66764</c:v>
                 </c:pt>
               </c:numCache>
             </c:numRef>
@@ -396,76 +402,76 @@
                 <c:formatCode>General</c:formatCode>
                 <c:ptCount val="24"/>
                 <c:pt idx="0">
-                  <c:v>1077009.4368</c:v>
+                  <c:v>1246368.2935</c:v>
                 </c:pt>
                 <c:pt idx="1">
-                  <c:v>1123562.2595</c:v>
+                  <c:v>1174835.1958</c:v>
                 </c:pt>
                 <c:pt idx="2">
-                  <c:v>1082951.6936</c:v>
+                  <c:v>1199541.6512</c:v>
                 </c:pt>
                 <c:pt idx="3">
-                  <c:v>1038711.2234</c:v>
+                  <c:v>1145043.2384</c:v>
                 </c:pt>
                 <c:pt idx="4">
-                  <c:v>1040019.5353999999</c:v>
+                  <c:v>1098739.6416</c:v>
                 </c:pt>
                 <c:pt idx="5">
-                  <c:v>1033051.8162</c:v>
+                  <c:v>1133236.8065</c:v>
                 </c:pt>
                 <c:pt idx="6">
-                  <c:v>996607.6444</c:v>
+                  <c:v>1072660.7741999999</c:v>
                 </c:pt>
                 <c:pt idx="7">
-                  <c:v>914607.0272</c:v>
+                  <c:v>1027095.8587</c:v>
                 </c:pt>
                 <c:pt idx="8">
-                  <c:v>1080115.6517</c:v>
+                  <c:v>1129302.737</c:v>
                 </c:pt>
                 <c:pt idx="9">
-                  <c:v>1018396.7282</c:v>
+                  <c:v>1132149.9397</c:v>
                 </c:pt>
                 <c:pt idx="10">
-                  <c:v>1170736.2375</c:v>
+                  <c:v>1232400.8414</c:v>
                 </c:pt>
                 <c:pt idx="11">
-                  <c:v>1147222.366</c:v>
+                  <c:v>1285434.3332</c:v>
                 </c:pt>
                 <c:pt idx="12">
-                  <c:v>1202762.0032</c:v>
+                  <c:v>1288052.4749</c:v>
                 </c:pt>
                 <c:pt idx="13">
-                  <c:v>1528926.2854</c:v>
+                  <c:v>1653566.1195</c:v>
                 </c:pt>
                 <c:pt idx="14">
-                  <c:v>1467254.7608</c:v>
+                  <c:v>1570005.8144</c:v>
                 </c:pt>
                 <c:pt idx="15">
-                  <c:v>1474676.4951</c:v>
+                  <c:v>1577202.0089</c:v>
                 </c:pt>
                 <c:pt idx="16">
-                  <c:v>1396256.7714</c:v>
+                  <c:v>1502225.3403</c:v>
                 </c:pt>
                 <c:pt idx="17">
-                  <c:v>1434315.36</c:v>
+                  <c:v>1533940.2009</c:v>
                 </c:pt>
                 <c:pt idx="18">
-                  <c:v>1438506.2012</c:v>
+                  <c:v>1534919.3177</c:v>
                 </c:pt>
                 <c:pt idx="19">
-                  <c:v>1327102.3267</c:v>
+                  <c:v>1417463.9658</c:v>
                 </c:pt>
                 <c:pt idx="20">
-                  <c:v>1497401.5778</c:v>
+                  <c:v>1606032.0826</c:v>
                 </c:pt>
                 <c:pt idx="21">
-                  <c:v>1518459.2001</c:v>
+                  <c:v>1612815.8623</c:v>
                 </c:pt>
                 <c:pt idx="22">
-                  <c:v>1642759.90944</c:v>
+                  <c:v>1746107.25986</c:v>
                 </c:pt>
                 <c:pt idx="23">
-                  <c:v>1632244.06608</c:v>
+                  <c:v>1727486.51062</c:v>
                 </c:pt>
               </c:numCache>
             </c:numRef>
@@ -628,22 +634,22 @@
                 <c:formatCode>General</c:formatCode>
                 <c:ptCount val="6"/>
                 <c:pt idx="0">
-                  <c:v>12462140.263194226</c:v>
+                  <c:v>12492372.559243113</c:v>
                 </c:pt>
                 <c:pt idx="1">
-                  <c:v>7220761.885764816</c:v>
+                  <c:v>7163440.082642514</c:v>
                 </c:pt>
                 <c:pt idx="2">
-                  <c:v>4321881.497614444</c:v>
+                  <c:v>6760208.404099716</c:v>
                 </c:pt>
                 <c:pt idx="3">
-                  <c:v>3842538.4932015864</c:v>
+                  <c:v>3827444.9206161783</c:v>
                 </c:pt>
                 <c:pt idx="4">
-                  <c:v>1703350.489233042</c:v>
+                  <c:v>1689027.773926165</c:v>
                 </c:pt>
                 <c:pt idx="5">
-                  <c:v>732983.9481118865</c:v>
+                  <c:v>714132.5284523146</c:v>
                 </c:pt>
               </c:numCache>
             </c:numRef>
@@ -849,76 +855,76 @@
                 <c:formatCode>General</c:formatCode>
                 <c:ptCount val="24"/>
                 <c:pt idx="0">
-                  <c:v>1612955.0732971015</c:v>
+                  <c:v>1711879.993947464</c:v>
                 </c:pt>
                 <c:pt idx="1">
-                  <c:v>1641045.957237136</c:v>
+                  <c:v>1740008.3058999944</c:v>
                 </c:pt>
                 <c:pt idx="2">
-                  <c:v>1669136.8411771709</c:v>
+                  <c:v>1768136.6178525249</c:v>
                 </c:pt>
                 <c:pt idx="3">
-                  <c:v>1697227.7251172056</c:v>
+                  <c:v>1796264.9298050555</c:v>
                 </c:pt>
                 <c:pt idx="4">
-                  <c:v>1725318.6090572404</c:v>
+                  <c:v>1824393.241757586</c:v>
                 </c:pt>
                 <c:pt idx="5">
-                  <c:v>1753409.4929972752</c:v>
+                  <c:v>1852521.5537101163</c:v>
                 </c:pt>
                 <c:pt idx="6">
-                  <c:v>1781500.3769373097</c:v>
+                  <c:v>1880649.865662647</c:v>
                 </c:pt>
                 <c:pt idx="7">
-                  <c:v>1809591.2608773448</c:v>
+                  <c:v>1908778.1776151774</c:v>
                 </c:pt>
                 <c:pt idx="8">
-                  <c:v>1837682.1448173793</c:v>
+                  <c:v>1936906.4895677078</c:v>
                 </c:pt>
                 <c:pt idx="9">
-                  <c:v>1865773.0287574143</c:v>
+                  <c:v>1965034.8015202382</c:v>
                 </c:pt>
                 <c:pt idx="10">
-                  <c:v>1893863.9126974489</c:v>
+                  <c:v>1993163.1134727686</c:v>
                 </c:pt>
                 <c:pt idx="11">
-                  <c:v>1921954.7966374836</c:v>
+                  <c:v>2021291.425425299</c:v>
                 </c:pt>
                 <c:pt idx="12">
-                  <c:v>1950045.6805775184</c:v>
+                  <c:v>2049419.7373778294</c:v>
                 </c:pt>
                 <c:pt idx="13">
-                  <c:v>1978136.5645175532</c:v>
+                  <c:v>2077548.0493303598</c:v>
                 </c:pt>
                 <c:pt idx="14">
-                  <c:v>2006227.448457588</c:v>
+                  <c:v>2105676.36128289</c:v>
                 </c:pt>
                 <c:pt idx="15">
-                  <c:v>2034318.3323976228</c:v>
+                  <c:v>2133804.6732354206</c:v>
                 </c:pt>
                 <c:pt idx="16">
-                  <c:v>2062409.2163376575</c:v>
+                  <c:v>2161932.985187951</c:v>
                 </c:pt>
                 <c:pt idx="17">
-                  <c:v>2090500.1002776923</c:v>
+                  <c:v>2190061.2971404814</c:v>
                 </c:pt>
                 <c:pt idx="18">
-                  <c:v>2118590.9842177266</c:v>
+                  <c:v>2218189.609093012</c:v>
                 </c:pt>
                 <c:pt idx="19">
-                  <c:v>2146681.8681577616</c:v>
+                  <c:v>2246317.921045542</c:v>
                 </c:pt>
                 <c:pt idx="20">
-                  <c:v>2174772.7520977966</c:v>
+                  <c:v>2274446.232998073</c:v>
                 </c:pt>
                 <c:pt idx="21">
-                  <c:v>2202863.636037831</c:v>
+                  <c:v>2302574.5449506035</c:v>
                 </c:pt>
                 <c:pt idx="22">
-                  <c:v>2230954.5199778657</c:v>
+                  <c:v>2330702.856903134</c:v>
                 </c:pt>
                 <c:pt idx="23">
-                  <c:v>2259045.4039179008</c:v>
+                  <c:v>2358831.1688556643</c:v>
                 </c:pt>
               </c:numCache>
             </c:numRef>
@@ -1039,76 +1045,76 @@
                 <c:formatCode>General</c:formatCode>
                 <c:ptCount val="24"/>
                 <c:pt idx="0">
-                  <c:v>1470786.8774910842</c:v>
+                  <c:v>1559562.304942423</c:v>
                 </c:pt>
                 <c:pt idx="1">
-                  <c:v>1439989.7665901526</c:v>
+                  <c:v>1524598.5643197382</c:v>
                 </c:pt>
                 <c:pt idx="2">
-                  <c:v>1422894.3028207482</c:v>
+                  <c:v>1504314.6416043185</c:v>
                 </c:pt>
                 <c:pt idx="3">
-                  <c:v>1412891.333505171</c:v>
+                  <c:v>1491629.5517949737</c:v>
                 </c:pt>
                 <c:pt idx="4">
-                  <c:v>1407420.8589964851</c:v>
+                  <c:v>1483800.534966642</c:v>
                 </c:pt>
                 <c:pt idx="5">
-                  <c:v>1405169.9556204453</c:v>
+                  <c:v>1479420.9368478304</c:v>
                 </c:pt>
                 <c:pt idx="6">
-                  <c:v>1405358.686491852</c:v>
+                  <c:v>1477655.1402792314</c:v>
                 </c:pt>
                 <c:pt idx="7">
-                  <c:v>1407478.8795833776</c:v>
+                  <c:v>1477958.6944546648</c:v>
                 </c:pt>
                 <c:pt idx="8">
-                  <c:v>1411177.5573993272</c:v>
+                  <c:v>1479953.422552585</c:v>
                 </c:pt>
                 <c:pt idx="9">
-                  <c:v>1416197.7191736018</c:v>
+                  <c:v>1483363.9763311225</c:v>
                 </c:pt>
                 <c:pt idx="10">
-                  <c:v>1422345.3500871111</c:v>
+                  <c:v>1487982.4901090057</c:v>
                 </c:pt>
                 <c:pt idx="11">
-                  <c:v>1429469.7199246383</c:v>
+                  <c:v>1493647.4729288863</c:v>
                 </c:pt>
                 <c:pt idx="12">
-                  <c:v>1437450.9608587183</c:v>
+                  <c:v>1500230.4995099767</c:v>
                 </c:pt>
                 <c:pt idx="13">
-                  <c:v>1446191.8845156443</c:v>
+                  <c:v>1507627.4431283125</c:v>
                 </c:pt>
                 <c:pt idx="14">
-                  <c:v>1455612.3937405276</c:v>
+                  <c:v>1515752.488433566</c:v>
                 </c:pt>
                 <c:pt idx="15">
-                  <c:v>1465645.5491735532</c:v>
+                  <c:v>1524533.917215257</c:v>
                 </c:pt>
                 <c:pt idx="16">
-                  <c:v>1476234.7284259542</c:v>
+                  <c:v>1533911.0647701854</c:v>
                 </c:pt>
                 <c:pt idx="17">
-                  <c:v>1487331.5283367417</c:v>
+                  <c:v>1543832.072399713</c:v>
                 </c:pt>
                 <c:pt idx="18">
-                  <c:v>1498894.1857137938</c:v>
+                  <c:v>1554252.195406382</c:v>
                 </c:pt>
                 <c:pt idx="19">
-                  <c:v>1510886.368036251</c:v>
+                  <c:v>1565132.5074636545</c:v>
                 </c:pt>
                 <c:pt idx="20">
-                  <c:v>1523276.2334014187</c:v>
+                  <c:v>1576438.89345173</c:v>
                 </c:pt>
                 <c:pt idx="21">
-                  <c:v>1536035.6898836242</c:v>
+                  <c:v>1588141.2559414753</c:v>
                 </c:pt>
                 <c:pt idx="22">
-                  <c:v>1549139.8049188724</c:v>
+                  <c:v>1600212.8824146155</c:v>
                 </c:pt>
                 <c:pt idx="23">
-                  <c:v>1562566.329164241</c:v>
+                  <c:v>1612629.9351310926</c:v>
                 </c:pt>
               </c:numCache>
             </c:numRef>
@@ -1229,76 +1235,76 @@
                 <c:formatCode>General</c:formatCode>
                 <c:ptCount val="24"/>
                 <c:pt idx="0">
-                  <c:v>1755123.269103119</c:v>
+                  <c:v>1864197.682952505</c:v>
                 </c:pt>
                 <c:pt idx="1">
-                  <c:v>1842102.1478841195</c:v>
+                  <c:v>1955418.0474802507</c:v>
                 </c:pt>
                 <c:pt idx="2">
-                  <c:v>1915379.3795335935</c:v>
+                  <c:v>2031958.5941007312</c:v>
                 </c:pt>
                 <c:pt idx="3">
-                  <c:v>1981564.1167292404</c:v>
+                  <c:v>2100900.3078151373</c:v>
                 </c:pt>
                 <c:pt idx="4">
-                  <c:v>2043216.3591179957</c:v>
+                  <c:v>2164985.9485485298</c:v>
                 </c:pt>
                 <c:pt idx="5">
-                  <c:v>2101649.030374105</c:v>
+                  <c:v>2225622.170572402</c:v>
                 </c:pt>
                 <c:pt idx="6">
-                  <c:v>2157642.067382768</c:v>
+                  <c:v>2283644.5910460628</c:v>
                 </c:pt>
                 <c:pt idx="7">
-                  <c:v>2211703.6421713117</c:v>
+                  <c:v>2339597.66077569</c:v>
                 </c:pt>
                 <c:pt idx="8">
-                  <c:v>2264186.7322354317</c:v>
+                  <c:v>2393859.5565828304</c:v>
                 </c:pt>
                 <c:pt idx="9">
-                  <c:v>2315348.338341227</c:v>
+                  <c:v>2446705.626709354</c:v>
                 </c:pt>
                 <c:pt idx="10">
-                  <c:v>2365382.475307787</c:v>
+                  <c:v>2498343.7368365317</c:v>
                 </c:pt>
                 <c:pt idx="11">
-                  <c:v>2414439.8733503288</c:v>
+                  <c:v>2548935.3779217117</c:v>
                 </c:pt>
                 <c:pt idx="12">
-                  <c:v>2462640.4002963183</c:v>
+                  <c:v>2598608.975245682</c:v>
                 </c:pt>
                 <c:pt idx="13">
-                  <c:v>2510081.244519462</c:v>
+                  <c:v>2647468.655532407</c:v>
                 </c:pt>
                 <c:pt idx="14">
-                  <c:v>2556842.5031746486</c:v>
+                  <c:v>2695600.2341322144</c:v>
                 </c:pt>
                 <c:pt idx="15">
-                  <c:v>2602991.1156216925</c:v>
+                  <c:v>2743075.4292555843</c:v>
                 </c:pt>
                 <c:pt idx="16">
-                  <c:v>2648583.7042493606</c:v>
+                  <c:v>2789954.9056057166</c:v>
                 </c:pt>
                 <c:pt idx="17">
-                  <c:v>2693668.672218643</c:v>
+                  <c:v>2836290.5218812497</c:v>
                 </c:pt>
                 <c:pt idx="18">
-                  <c:v>2738287.782721659</c:v>
+                  <c:v>2882127.0227796417</c:v>
                 </c:pt>
                 <c:pt idx="19">
-                  <c:v>2782477.368279272</c:v>
+                  <c:v>2927503.33462743</c:v>
                 </c:pt>
                 <c:pt idx="20">
-                  <c:v>2826269.2707941746</c:v>
+                  <c:v>2972453.5725444164</c:v>
                 </c:pt>
                 <c:pt idx="21">
-                  <c:v>2869691.582192038</c:v>
+                  <c:v>3017007.8339597317</c:v>
                 </c:pt>
                 <c:pt idx="22">
-                  <c:v>2912769.2350368593</c:v>
+                  <c:v>3061192.831391652</c:v>
                 </c:pt>
                 <c:pt idx="23">
-                  <c:v>2955524.4786715605</c:v>
+                  <c:v>3105032.402580236</c:v>
                 </c:pt>
               </c:numCache>
             </c:numRef>
@@ -1466,13 +1472,13 @@
                 <c:formatCode>General</c:formatCode>
                 <c:ptCount val="3"/>
                 <c:pt idx="0">
-                  <c:v>3419984.6399999997</c:v>
+                  <c:v>3814495.3200000003</c:v>
                 </c:pt>
                 <c:pt idx="1">
-                  <c:v>1316361.72</c:v>
+                  <c:v>1494944.52</c:v>
                 </c:pt>
                 <c:pt idx="2">
-                  <c:v>209957.28</c:v>
+                  <c:v>215185.68</c:v>
                 </c:pt>
               </c:numCache>
             </c:numRef>
@@ -4692,7 +4698,7 @@
                 </a:solidFill>
                 <a:latin typeface="Segoe UI"/>
               </a:rPr>
-              <a:t>A single plane of control for AWS, Azure and GCP spend</a:t>
+              <a:t>A single plane of control for AWS, Azure, GCP and OCI spend</a:t>
             </a:r>
           </a:p>
         </p:txBody>
@@ -4818,7 +4824,7 @@
                 </a:solidFill>
                 <a:latin typeface="Segoe UI"/>
               </a:rPr>
-              <a:t>—  53 FinOps optimization levers, detected from the bill itself</a:t>
+              <a:t>—  59 FinOps optimization levers, detected from the bill itself</a:t>
             </a:r>
           </a:p>
           <a:p>
@@ -4834,7 +4840,7 @@
                 </a:solidFill>
                 <a:latin typeface="Segoe UI"/>
               </a:rPr>
-              <a:t>—  Vendor-neutral: 17 connectors, one FOCUS schema underneath</a:t>
+              <a:t>—  Vendor-neutral: 18 connectors, one FOCUS schema underneath</a:t>
             </a:r>
           </a:p>
         </p:txBody>
@@ -5290,7 +5296,7 @@
                 </a:solidFill>
                 <a:latin typeface="Segoe UI"/>
               </a:rPr>
-              <a:t>Allocation coverage is 85.9%. Practitioner consensus puts the chargeback-readiness line near 90%, so this estate is: hybrid: chargeback tagged, showback remainder. Showback moves information; chargeback moves money. Neither is 'more mature' — it is an accounting-policy choice.</a:t>
+              <a:t>Allocation coverage is 82.6%. Practitioner consensus puts the chargeback-readiness line near 90%, so this estate is: hybrid: chargeback tagged, showback remainder. Showback moves information; chargeback moves money. Neither is 'more mature' — it is an accounting-policy choice.</a:t>
             </a:r>
           </a:p>
         </p:txBody>
@@ -5503,7 +5509,7 @@
                 </a:solidFill>
                 <a:latin typeface="Segoe UI"/>
               </a:rPr>
-              <a:t>Method chosen by rolling-origin backtest: Linear · WAPE 4.83% (Best-in-class)</a:t>
+              <a:t>Method chosen by rolling-origin backtest: Linear · WAPE 4.74% (Best-in-class)</a:t>
             </a:r>
           </a:p>
         </p:txBody>
@@ -5733,7 +5739,7 @@
                 </a:solidFill>
                 <a:latin typeface="Segoe UI"/>
               </a:rPr>
-              <a:t>$46.46M</a:t>
+              <a:t>$48.85M</a:t>
             </a:r>
           </a:p>
         </p:txBody>
@@ -5940,7 +5946,7 @@
                 </a:solidFill>
                 <a:latin typeface="Segoe UI"/>
               </a:rPr>
-              <a:t>$51.16M</a:t>
+              <a:t>$53.79M</a:t>
             </a:r>
           </a:p>
         </p:txBody>
@@ -6018,7 +6024,7 @@
                 </a:solidFill>
                 <a:latin typeface="Segoe UI"/>
               </a:rPr>
-              <a:t>When an RI, Savings Plan or CUD term ends, the rate snaps back to on-demand. The overlay adds $4.70M the trend line never sees. This is the single most important thing naive cloud forecasting misses.</a:t>
+              <a:t>When an RI, Savings Plan or CUD term ends, the rate snaps back to on-demand. The overlay adds $4.94M the trend line never sees. This is the single most important thing naive cloud forecasting misses.</a:t>
             </a:r>
           </a:p>
         </p:txBody>
@@ -6231,7 +6237,7 @@
                 </a:solidFill>
                 <a:latin typeface="Segoe UI"/>
               </a:rPr>
-              <a:t>$4.95M identified, across 30 opportunities</a:t>
+              <a:t>$5.52M identified, across 36 opportunities</a:t>
             </a:r>
           </a:p>
         </p:txBody>
@@ -6766,7 +6772,7 @@
                 </a:solidFill>
                 <a:latin typeface="Segoe UI"/>
               </a:rPr>
-              <a:t>$1.33M</a:t>
+              <a:t>$1.19M</a:t>
             </a:r>
           </a:p>
         </p:txBody>
@@ -6961,7 +6967,7 @@
                 </a:solidFill>
                 <a:latin typeface="Segoe UI"/>
               </a:rPr>
-              <a:t>$745K</a:t>
+              <a:t>$787K</a:t>
             </a:r>
           </a:p>
         </p:txBody>
@@ -7156,7 +7162,7 @@
                 </a:solidFill>
                 <a:latin typeface="Segoe UI"/>
               </a:rPr>
-              <a:t>$738K</a:t>
+              <a:t>$745K</a:t>
             </a:r>
           </a:p>
         </p:txBody>
@@ -7351,7 +7357,7 @@
                 </a:solidFill>
                 <a:latin typeface="Segoe UI"/>
               </a:rPr>
-              <a:t>$442K</a:t>
+              <a:t>$462K</a:t>
             </a:r>
           </a:p>
         </p:txBody>
@@ -7429,7 +7435,7 @@
                 </a:solidFill>
                 <a:latin typeface="Segoe UI"/>
               </a:rPr>
-              <a:t>R9</a:t>
+              <a:t>R17</a:t>
             </a:r>
           </a:p>
         </p:txBody>
@@ -7468,7 +7474,7 @@
                 </a:solidFill>
                 <a:latin typeface="Segoe UI"/>
               </a:rPr>
-              <a:t>Spot / Preemptible / Azure Spot</a:t>
+              <a:t>OCI Annual Universal Credits</a:t>
             </a:r>
           </a:p>
         </p:txBody>
@@ -7507,7 +7513,7 @@
                 </a:solidFill>
                 <a:latin typeface="Segoe UI"/>
               </a:rPr>
-              <a:t>AWS</a:t>
+              <a:t>OCI</a:t>
             </a:r>
           </a:p>
         </p:txBody>
@@ -7546,7 +7552,7 @@
                 </a:solidFill>
                 <a:latin typeface="Segoe UI"/>
               </a:rPr>
-              <a:t>$171K</a:t>
+              <a:t>$340K</a:t>
             </a:r>
           </a:p>
         </p:txBody>
@@ -7585,7 +7591,7 @@
                 </a:solidFill>
                 <a:latin typeface="Segoe UI"/>
               </a:rPr>
-              <a:t>Medium/High</a:t>
+              <a:t>Low/Low</a:t>
             </a:r>
           </a:p>
         </p:txBody>
@@ -7624,7 +7630,7 @@
                 </a:solidFill>
                 <a:latin typeface="Segoe UI"/>
               </a:rPr>
-              <a:t>R12</a:t>
+              <a:t>U17</a:t>
             </a:r>
           </a:p>
         </p:txBody>
@@ -7663,7 +7669,7 @@
                 </a:solidFill>
                 <a:latin typeface="Segoe UI"/>
               </a:rPr>
-              <a:t>BYOL / licence mobility</a:t>
+              <a:t>Previous-generation instance fam</a:t>
             </a:r>
           </a:p>
         </p:txBody>
@@ -7702,7 +7708,7 @@
                 </a:solidFill>
                 <a:latin typeface="Segoe UI"/>
               </a:rPr>
-              <a:t>AWS</a:t>
+              <a:t>AWS, Azure, GC</a:t>
             </a:r>
           </a:p>
         </p:txBody>
@@ -7741,7 +7747,7 @@
                 </a:solidFill>
                 <a:latin typeface="Segoe UI"/>
               </a:rPr>
-              <a:t>$168K</a:t>
+              <a:t>$179K</a:t>
             </a:r>
           </a:p>
         </p:txBody>
@@ -7780,7 +7786,7 @@
                 </a:solidFill>
                 <a:latin typeface="Segoe UI"/>
               </a:rPr>
-              <a:t>Medium/Medium</a:t>
+              <a:t>Low/Low</a:t>
             </a:r>
           </a:p>
         </p:txBody>
@@ -7819,7 +7825,7 @@
                 </a:solidFill>
                 <a:latin typeface="Segoe UI"/>
               </a:rPr>
-              <a:t>U17</a:t>
+              <a:t>R9</a:t>
             </a:r>
           </a:p>
         </p:txBody>
@@ -7858,7 +7864,7 @@
                 </a:solidFill>
                 <a:latin typeface="Segoe UI"/>
               </a:rPr>
-              <a:t>Previous-generation instance fam</a:t>
+              <a:t>Spot / Preemptible / Azure Spot</a:t>
             </a:r>
           </a:p>
         </p:txBody>
@@ -7897,7 +7903,7 @@
                 </a:solidFill>
                 <a:latin typeface="Segoe UI"/>
               </a:rPr>
-              <a:t>AWS, Azure, GC</a:t>
+              <a:t>AWS</a:t>
             </a:r>
           </a:p>
         </p:txBody>
@@ -7936,7 +7942,7 @@
                 </a:solidFill>
                 <a:latin typeface="Segoe UI"/>
               </a:rPr>
-              <a:t>$151K</a:t>
+              <a:t>$152K</a:t>
             </a:r>
           </a:p>
         </p:txBody>
@@ -7975,7 +7981,7 @@
                 </a:solidFill>
                 <a:latin typeface="Segoe UI"/>
               </a:rPr>
-              <a:t>Low/Low</a:t>
+              <a:t>Medium/High</a:t>
             </a:r>
           </a:p>
         </p:txBody>
@@ -8014,7 +8020,7 @@
                 </a:solidFill>
                 <a:latin typeface="Segoe UI"/>
               </a:rPr>
-              <a:t>U4</a:t>
+              <a:t>R12</a:t>
             </a:r>
           </a:p>
         </p:txBody>
@@ -8053,7 +8059,7 @@
                 </a:solidFill>
                 <a:latin typeface="Segoe UI"/>
               </a:rPr>
-              <a:t>Unattached EBS / managed disks</a:t>
+              <a:t>BYOL / licence mobility</a:t>
             </a:r>
           </a:p>
         </p:txBody>
@@ -8092,7 +8098,7 @@
                 </a:solidFill>
                 <a:latin typeface="Segoe UI"/>
               </a:rPr>
-              <a:t>AWS, Azure, GC</a:t>
+              <a:t>AWS</a:t>
             </a:r>
           </a:p>
         </p:txBody>
@@ -8131,7 +8137,7 @@
                 </a:solidFill>
                 <a:latin typeface="Segoe UI"/>
               </a:rPr>
-              <a:t>$111K</a:t>
+              <a:t>$151K</a:t>
             </a:r>
           </a:p>
         </p:txBody>
@@ -8170,7 +8176,7 @@
                 </a:solidFill>
                 <a:latin typeface="Segoe UI"/>
               </a:rPr>
-              <a:t>Low/Low</a:t>
+              <a:t>Medium/Medium</a:t>
             </a:r>
           </a:p>
         </p:txBody>
@@ -8209,7 +8215,7 @@
                 </a:solidFill>
                 <a:latin typeface="Segoe UI"/>
               </a:rPr>
-              <a:t>Executing the rate levers alone would move Effective Savings Rate from 21.6% to 39.6% (+17.9 points). Savings percentages in the catalog are vendor 'up-to' figures — ceilings, not guarantees. Where a detector cannot see what it needs (access patterns, CPU utilisation) it lowers its confidence and says so.</a:t>
+              <a:t>Executing the rate levers alone would move Effective Savings Rate from 21.6% to 40.2% (+18.6 points). Savings percentages in the catalog are vendor 'up-to' figures — ceilings, not guarantees. Where a detector cannot see what it needs (access patterns, CPU utilisation) it lowers its confidence and says so.</a:t>
             </a:r>
           </a:p>
         </p:txBody>
@@ -8861,7 +8867,7 @@
                 </a:solidFill>
                 <a:latin typeface="Segoe UI"/>
               </a:rPr>
-              <a:t>$23K</a:t>
+              <a:t>$27K</a:t>
             </a:r>
           </a:p>
         </p:txBody>
@@ -8900,7 +8906,7 @@
                 </a:solidFill>
                 <a:latin typeface="Segoe UI"/>
               </a:rPr>
-              <a:t>$4K</a:t>
+              <a:t>$5K</a:t>
             </a:r>
           </a:p>
         </p:txBody>
@@ -8939,7 +8945,7 @@
                 </a:solidFill>
                 <a:latin typeface="Segoe UI"/>
               </a:rPr>
-              <a:t>+426%</a:t>
+              <a:t>+489%</a:t>
             </a:r>
           </a:p>
         </p:txBody>
@@ -9095,7 +9101,7 @@
                 </a:solidFill>
                 <a:latin typeface="Segoe UI"/>
               </a:rPr>
-              <a:t>$11K</a:t>
+              <a:t>$10K</a:t>
             </a:r>
           </a:p>
         </p:txBody>
@@ -9173,7 +9179,7 @@
                 </a:solidFill>
                 <a:latin typeface="Segoe UI"/>
               </a:rPr>
-              <a:t>+384%</a:t>
+              <a:t>+388%</a:t>
             </a:r>
           </a:p>
         </p:txBody>
@@ -9329,7 +9335,7 @@
                 </a:solidFill>
                 <a:latin typeface="Segoe UI"/>
               </a:rPr>
-              <a:t>$263</a:t>
+              <a:t>$257</a:t>
             </a:r>
           </a:p>
         </p:txBody>
@@ -9368,7 +9374,7 @@
                 </a:solidFill>
                 <a:latin typeface="Segoe UI"/>
               </a:rPr>
-              <a:t>$159</a:t>
+              <a:t>$158</a:t>
             </a:r>
           </a:p>
         </p:txBody>
@@ -9407,7 +9413,7 @@
                 </a:solidFill>
                 <a:latin typeface="Segoe UI"/>
               </a:rPr>
-              <a:t>+65%</a:t>
+              <a:t>+63%</a:t>
             </a:r>
           </a:p>
         </p:txBody>
@@ -10334,7 +10340,7 @@
                 </a:solidFill>
                 <a:latin typeface="Segoe UI"/>
               </a:rPr>
-              <a:t>A second credential is needed only for a second PAYER — another AWS organization, another Azure tenant or billing account, another GCP billing account. A regulated utility usually has several, because regulated and unregulated entities cannot share a bill. Declare each as an [[accounts]] entry; they are pulled independently and concatenated into one FOCUS frame, where BillingAccountId keeps them apart. A failing binding never takes the page down.</a:t>
+              <a:t>A second credential is needed only for a second PAYER — another AWS organization, another Azure tenant, another OCI tenancy or billing account, another GCP billing account. A regulated utility usually has several, because regulated and unregulated entities cannot share a bill. Declare each as an [[accounts]] entry; they are pulled independently and concatenated into one FOCUS frame, where BillingAccountId keeps them apart. A failing binding never takes the page down.</a:t>
             </a:r>
           </a:p>
         </p:txBody>
@@ -14134,7 +14140,7 @@
                 </a:solidFill>
                 <a:latin typeface="Segoe UI"/>
               </a:rPr>
-              <a:t>17 connectors, one schema</a:t>
+              <a:t>18 connectors, one schema</a:t>
             </a:r>
           </a:p>
         </p:txBody>
@@ -14418,6 +14424,22 @@
                 <a:latin typeface="Segoe UI"/>
               </a:rPr>
               <a:t>·  GCP — BigQuery billing export, Recommender, Budgets</a:t>
+            </a:r>
+          </a:p>
+          <a:p>
+            <a:pPr>
+              <a:spcAft>
+                <a:spcPts val="900"/>
+              </a:spcAft>
+            </a:pPr>
+            <a:r>
+              <a:rPr sz="1050">
+                <a:solidFill>
+                  <a:srgbClr val="445066"/>
+                </a:solidFill>
+                <a:latin typeface="Segoe UI"/>
+              </a:rPr>
+              <a:t>·  OCI — FOCUS cost reports, Cloud Advisor, Budgets</a:t>
             </a:r>
           </a:p>
         </p:txBody>
@@ -16073,7 +16095,7 @@
                 </a:solidFill>
                 <a:latin typeface="Segoe UI"/>
               </a:rPr>
-              <a:t>Three clouds, three answers, no single truth</a:t>
+              <a:t>Four clouds, four answers, no single truth</a:t>
             </a:r>
           </a:p>
         </p:txBody>
@@ -16280,7 +16302,7 @@
                 </a:solidFill>
                 <a:latin typeface="Segoe UI"/>
               </a:rPr>
-              <a:t>Each provider bills in its own schema. Reconciling AWS, Azure and GCP by hand is a monthly project, not a dashboard.</a:t>
+              <a:t>Each provider bills in its own schema. Reconciling AWS, Azure, GCP and OCI by hand is a monthly project, not a dashboard.</a:t>
             </a:r>
           </a:p>
         </p:txBody>
@@ -18433,7 +18455,7 @@
                 </a:solidFill>
                 <a:latin typeface="Segoe UI"/>
               </a:rPr>
-              <a:t>Any procured FinOps tool</a:t>
+              <a:t>OCI FOCUS Reports</a:t>
             </a:r>
           </a:p>
         </p:txBody>
@@ -18518,6 +18540,91 @@
                 </a:solidFill>
                 <a:latin typeface="Segoe UI"/>
               </a:rPr>
+              <a:t>Any procured FinOps tool</a:t>
+            </a:r>
+          </a:p>
+        </p:txBody>
+      </p:sp>
+      <p:sp>
+        <p:nvSpPr>
+          <p:cNvPr id="16" name="Rounded Rectangle 15"/>
+          <p:cNvSpPr/>
+          <p:nvPr/>
+        </p:nvSpPr>
+        <p:spPr>
+          <a:xfrm>
+            <a:off x="640080" y="5212080"/>
+            <a:ext cx="2651760" cy="502920"/>
+          </a:xfrm>
+          <a:prstGeom prst="roundRect">
+            <a:avLst>
+              <a:gd name="adj" fmla="val 6000"/>
+            </a:avLst>
+          </a:prstGeom>
+          <a:solidFill>
+            <a:srgbClr val="FFFFFF"/>
+          </a:solidFill>
+          <a:ln w="12700">
+            <a:solidFill>
+              <a:srgbClr val="E2E7EF"/>
+            </a:solidFill>
+          </a:ln>
+          <a:effectLst/>
+        </p:spPr>
+        <p:style>
+          <a:lnRef idx="1">
+            <a:schemeClr val="accent1"/>
+          </a:lnRef>
+          <a:fillRef idx="3">
+            <a:schemeClr val="accent1"/>
+          </a:fillRef>
+          <a:effectRef idx="2">
+            <a:schemeClr val="accent1"/>
+          </a:effectRef>
+          <a:fontRef idx="minor">
+            <a:schemeClr val="lt1"/>
+          </a:fontRef>
+        </p:style>
+        <p:txBody>
+          <a:bodyPr rtlCol="0" anchor="ctr"/>
+          <a:lstStyle/>
+          <a:p/>
+        </p:txBody>
+      </p:sp>
+      <p:sp>
+        <p:nvSpPr>
+          <p:cNvPr id="17" name="TextBox 16"/>
+          <p:cNvSpPr txBox="1"/>
+          <p:nvPr/>
+        </p:nvSpPr>
+        <p:spPr>
+          <a:xfrm>
+            <a:off x="777240" y="5312664"/>
+            <a:ext cx="2468880" cy="320040"/>
+          </a:xfrm>
+          <a:prstGeom prst="rect">
+            <a:avLst/>
+          </a:prstGeom>
+          <a:noFill/>
+        </p:spPr>
+        <p:txBody>
+          <a:bodyPr wrap="square">
+            <a:spAutoFit/>
+          </a:bodyPr>
+          <a:lstStyle/>
+          <a:p>
+            <a:pPr algn="l">
+              <a:spcAft>
+                <a:spcPts val="400"/>
+              </a:spcAft>
+            </a:pPr>
+            <a:r>
+              <a:rPr sz="1100" b="0">
+                <a:solidFill>
+                  <a:srgbClr val="445066"/>
+                </a:solidFill>
+                <a:latin typeface="Segoe UI"/>
+              </a:rPr>
               <a:t>Any FOCUS CSV / Parquet</a:t>
             </a:r>
           </a:p>
@@ -18525,7 +18632,7 @@
       </p:sp>
       <p:sp>
         <p:nvSpPr>
-          <p:cNvPr id="16" name="Rounded Rectangle 15"/>
+          <p:cNvPr id="18" name="Rounded Rectangle 17"/>
           <p:cNvSpPr/>
           <p:nvPr/>
         </p:nvSpPr>
@@ -18571,7 +18678,7 @@
       </p:sp>
       <p:sp>
         <p:nvSpPr>
-          <p:cNvPr id="17" name="TextBox 16"/>
+          <p:cNvPr id="19" name="TextBox 18"/>
           <p:cNvSpPr txBox="1"/>
           <p:nvPr/>
         </p:nvSpPr>
@@ -18610,7 +18717,7 @@
       </p:sp>
       <p:sp>
         <p:nvSpPr>
-          <p:cNvPr id="18" name="Rounded Rectangle 17"/>
+          <p:cNvPr id="20" name="Rounded Rectangle 19"/>
           <p:cNvSpPr/>
           <p:nvPr/>
         </p:nvSpPr>
@@ -18656,7 +18763,7 @@
       </p:sp>
       <p:sp>
         <p:nvSpPr>
-          <p:cNvPr id="19" name="TextBox 18"/>
+          <p:cNvPr id="21" name="TextBox 20"/>
           <p:cNvSpPr txBox="1"/>
           <p:nvPr/>
         </p:nvSpPr>
@@ -18695,7 +18802,7 @@
       </p:sp>
       <p:sp>
         <p:nvSpPr>
-          <p:cNvPr id="20" name="TextBox 19"/>
+          <p:cNvPr id="22" name="TextBox 21"/>
           <p:cNvSpPr txBox="1"/>
           <p:nvPr/>
         </p:nvSpPr>
@@ -18734,7 +18841,7 @@
       </p:sp>
       <p:sp>
         <p:nvSpPr>
-          <p:cNvPr id="21" name="Rounded Rectangle 20"/>
+          <p:cNvPr id="23" name="Rounded Rectangle 22"/>
           <p:cNvSpPr/>
           <p:nvPr/>
         </p:nvSpPr>
@@ -18780,7 +18887,7 @@
       </p:sp>
       <p:sp>
         <p:nvSpPr>
-          <p:cNvPr id="22" name="TextBox 21"/>
+          <p:cNvPr id="24" name="TextBox 23"/>
           <p:cNvSpPr txBox="1"/>
           <p:nvPr/>
         </p:nvSpPr>
@@ -18819,7 +18926,7 @@
       </p:sp>
       <p:sp>
         <p:nvSpPr>
-          <p:cNvPr id="23" name="Rounded Rectangle 22"/>
+          <p:cNvPr id="25" name="Rounded Rectangle 24"/>
           <p:cNvSpPr/>
           <p:nvPr/>
         </p:nvSpPr>
@@ -18865,7 +18972,7 @@
       </p:sp>
       <p:sp>
         <p:nvSpPr>
-          <p:cNvPr id="24" name="TextBox 23"/>
+          <p:cNvPr id="26" name="TextBox 25"/>
           <p:cNvSpPr txBox="1"/>
           <p:nvPr/>
         </p:nvSpPr>
@@ -18904,7 +19011,7 @@
       </p:sp>
       <p:sp>
         <p:nvSpPr>
-          <p:cNvPr id="25" name="Rounded Rectangle 24"/>
+          <p:cNvPr id="27" name="Rounded Rectangle 26"/>
           <p:cNvSpPr/>
           <p:nvPr/>
         </p:nvSpPr>
@@ -18950,7 +19057,7 @@
       </p:sp>
       <p:sp>
         <p:nvSpPr>
-          <p:cNvPr id="26" name="TextBox 25"/>
+          <p:cNvPr id="28" name="TextBox 27"/>
           <p:cNvSpPr txBox="1"/>
           <p:nvPr/>
         </p:nvSpPr>
@@ -18989,7 +19096,7 @@
       </p:sp>
       <p:sp>
         <p:nvSpPr>
-          <p:cNvPr id="27" name="Rounded Rectangle 26"/>
+          <p:cNvPr id="29" name="Rounded Rectangle 28"/>
           <p:cNvSpPr/>
           <p:nvPr/>
         </p:nvSpPr>
@@ -19035,7 +19142,7 @@
       </p:sp>
       <p:sp>
         <p:nvSpPr>
-          <p:cNvPr id="28" name="TextBox 27"/>
+          <p:cNvPr id="30" name="TextBox 29"/>
           <p:cNvSpPr txBox="1"/>
           <p:nvPr/>
         </p:nvSpPr>
@@ -19074,7 +19181,7 @@
       </p:sp>
       <p:sp>
         <p:nvSpPr>
-          <p:cNvPr id="29" name="Rounded Rectangle 28"/>
+          <p:cNvPr id="31" name="Rounded Rectangle 30"/>
           <p:cNvSpPr/>
           <p:nvPr/>
         </p:nvSpPr>
@@ -19120,7 +19227,7 @@
       </p:sp>
       <p:sp>
         <p:nvSpPr>
-          <p:cNvPr id="30" name="TextBox 29"/>
+          <p:cNvPr id="32" name="TextBox 31"/>
           <p:cNvSpPr txBox="1"/>
           <p:nvPr/>
         </p:nvSpPr>
@@ -19159,7 +19266,7 @@
       </p:sp>
       <p:sp>
         <p:nvSpPr>
-          <p:cNvPr id="31" name="Rounded Rectangle 30"/>
+          <p:cNvPr id="33" name="Rounded Rectangle 32"/>
           <p:cNvSpPr/>
           <p:nvPr/>
         </p:nvSpPr>
@@ -19205,7 +19312,7 @@
       </p:sp>
       <p:sp>
         <p:nvSpPr>
-          <p:cNvPr id="32" name="TextBox 31"/>
+          <p:cNvPr id="34" name="TextBox 33"/>
           <p:cNvSpPr txBox="1"/>
           <p:nvPr/>
         </p:nvSpPr>
@@ -19244,7 +19351,7 @@
       </p:sp>
       <p:sp>
         <p:nvSpPr>
-          <p:cNvPr id="33" name="TextBox 32"/>
+          <p:cNvPr id="35" name="TextBox 34"/>
           <p:cNvSpPr txBox="1"/>
           <p:nvPr/>
         </p:nvSpPr>
@@ -19283,7 +19390,7 @@
       </p:sp>
       <p:sp>
         <p:nvSpPr>
-          <p:cNvPr id="34" name="TextBox 33"/>
+          <p:cNvPr id="36" name="TextBox 35"/>
           <p:cNvSpPr txBox="1"/>
           <p:nvPr/>
         </p:nvSpPr>
@@ -19313,7 +19420,7 @@
       </p:sp>
       <p:sp>
         <p:nvSpPr>
-          <p:cNvPr id="35" name="TextBox 34"/>
+          <p:cNvPr id="37" name="TextBox 36"/>
           <p:cNvSpPr txBox="1"/>
           <p:nvPr/>
         </p:nvSpPr>
@@ -20074,7 +20181,7 @@
                 </a:solidFill>
                 <a:latin typeface="Segoe UI"/>
               </a:rPr>
-              <a:t>—  54,870 FOCUS charge rows</a:t>
+              <a:t>—  63,358 FOCUS charge rows</a:t>
             </a:r>
           </a:p>
           <a:p>
@@ -20290,7 +20397,7 @@
                 </a:solidFill>
                 <a:latin typeface="Segoe UI"/>
               </a:rPr>
-              <a:t>—  Native AWS / Azure / GCP, or a procured tool</a:t>
+              <a:t>—  Native AWS / Azure / GCP / OCI, or a procured tool</a:t>
             </a:r>
           </a:p>
           <a:p>
@@ -21281,7 +21388,7 @@
                 </a:solidFill>
                 <a:latin typeface="Segoe UI"/>
               </a:rPr>
-              <a:t>Amortised spend across AWS, Azure and GCP · 24 months of history</a:t>
+              <a:t>Amortised spend across AWS, Azure, GCP and OCI · 24 months of history</a:t>
             </a:r>
           </a:p>
         </p:txBody>
@@ -21493,7 +21600,7 @@
                 </a:solidFill>
                 <a:latin typeface="Segoe UI"/>
               </a:rPr>
-              <a:t>$30.28M</a:t>
+              <a:t>$32.65M</a:t>
             </a:r>
           </a:p>
         </p:txBody>
@@ -21532,7 +21639,7 @@
                 </a:solidFill>
                 <a:latin typeface="Segoe UI"/>
               </a:rPr>
-              <a:t>Run-rate $15.14M/yr</a:t>
+              <a:t>Run-rate $16.32M/yr</a:t>
             </a:r>
           </a:p>
         </p:txBody>
@@ -21907,7 +22014,7 @@
                 </a:solidFill>
                 <a:latin typeface="Segoe UI"/>
               </a:rPr>
-              <a:t>44.1%</a:t>
+              <a:t>42.0%</a:t>
             </a:r>
           </a:p>
         </p:txBody>
@@ -22153,7 +22260,7 @@
                 </a:solidFill>
                 <a:latin typeface="Segoe UI"/>
               </a:rPr>
-              <a:t>$327K unused</a:t>
+              <a:t>$346K unused</a:t>
             </a:r>
           </a:p>
         </p:txBody>
@@ -22321,7 +22428,7 @@
                 </a:solidFill>
                 <a:latin typeface="Segoe UI"/>
               </a:rPr>
-              <a:t>$2.26M</a:t>
+              <a:t>$2.52M</a:t>
             </a:r>
           </a:p>
         </p:txBody>
@@ -22360,7 +22467,7 @@
                 </a:solidFill>
                 <a:latin typeface="Segoe UI"/>
               </a:rPr>
-              <a:t>7.5% of spend</a:t>
+              <a:t>7.7% of spend</a:t>
             </a:r>
           </a:p>
         </p:txBody>
@@ -22528,7 +22635,7 @@
                 </a:solidFill>
                 <a:latin typeface="Segoe UI"/>
               </a:rPr>
-              <a:t>85.9%</a:t>
+              <a:t>82.6%</a:t>
             </a:r>
           </a:p>
         </p:txBody>
@@ -22606,7 +22713,7 @@
                 </a:solidFill>
                 <a:latin typeface="Segoe UI"/>
               </a:rPr>
-              <a:t>Effective Savings Rate is the outcome metric, not coverage. 100% coverage at 60% utilisation is still a bad deal, and only ESR shows that. FinOps Foundation benchmarks: median ~0%, 75th percentile ~23%, 98th percentile ~46%. This estate sits at 21.6% — above median, with $327K of commitment already burned unused.</a:t>
+              <a:t>Effective Savings Rate is the outcome metric, not coverage. 100% coverage at 60% utilisation is still a bad deal, and only ESR shows that. FinOps Foundation benchmarks: median ~0%, 75th percentile ~23%, 98th percentile ~46%. This estate sits at 21.6% — above median, with $346K of commitment already burned unused.</a:t>
             </a:r>
           </a:p>
         </p:txBody>
@@ -22938,7 +23045,7 @@
                 </a:solidFill>
                 <a:latin typeface="Segoe UI"/>
               </a:rPr>
-              <a:t>Month on month -0.6%.  Year on year +42.3% — the step change is a data-centre exit wave, which is precisely the shape a naive trend model extrapolates straight through.</a:t>
+              <a:t>Month on month -1.1%.  Year on year +34.4% — the step change is a data-centre exit wave, which is precisely the shape a naive trend model extrapolates straight through.</a:t>
             </a:r>
           </a:p>
         </p:txBody>
